--- a/Linear_Algebra/w3_Vectors_and_Linear_Transformations.pptx
+++ b/Linear_Algebra/w3_Vectors_and_Linear_Transformations.pptx
@@ -5,10 +5,10 @@
     <p:sldMasterId id="2147483660" r:id="rId1"/>
   </p:sldMasterIdLst>
   <p:notesMasterIdLst>
-    <p:notesMasterId r:id="rId64"/>
+    <p:notesMasterId r:id="rId65"/>
   </p:notesMasterIdLst>
   <p:handoutMasterIdLst>
-    <p:handoutMasterId r:id="rId65"/>
+    <p:handoutMasterId r:id="rId66"/>
   </p:handoutMasterIdLst>
   <p:sldIdLst>
     <p:sldId id="256" r:id="rId2"/>
@@ -43,36 +43,37 @@
     <p:sldId id="318" r:id="rId31"/>
     <p:sldId id="325" r:id="rId32"/>
     <p:sldId id="934" r:id="rId33"/>
-    <p:sldId id="933" r:id="rId34"/>
-    <p:sldId id="320" r:id="rId35"/>
-    <p:sldId id="326" r:id="rId36"/>
-    <p:sldId id="321" r:id="rId37"/>
-    <p:sldId id="354" r:id="rId38"/>
-    <p:sldId id="322" r:id="rId39"/>
-    <p:sldId id="323" r:id="rId40"/>
-    <p:sldId id="355" r:id="rId41"/>
-    <p:sldId id="345" r:id="rId42"/>
-    <p:sldId id="337" r:id="rId43"/>
-    <p:sldId id="344" r:id="rId44"/>
-    <p:sldId id="343" r:id="rId45"/>
-    <p:sldId id="356" r:id="rId46"/>
-    <p:sldId id="338" r:id="rId47"/>
-    <p:sldId id="339" r:id="rId48"/>
-    <p:sldId id="340" r:id="rId49"/>
-    <p:sldId id="341" r:id="rId50"/>
-    <p:sldId id="342" r:id="rId51"/>
-    <p:sldId id="347" r:id="rId52"/>
-    <p:sldId id="348" r:id="rId53"/>
-    <p:sldId id="263" r:id="rId54"/>
-    <p:sldId id="815" r:id="rId55"/>
-    <p:sldId id="816" r:id="rId56"/>
-    <p:sldId id="817" r:id="rId57"/>
-    <p:sldId id="821" r:id="rId58"/>
-    <p:sldId id="357" r:id="rId59"/>
-    <p:sldId id="811" r:id="rId60"/>
-    <p:sldId id="812" r:id="rId61"/>
-    <p:sldId id="909" r:id="rId62"/>
-    <p:sldId id="930" r:id="rId63"/>
+    <p:sldId id="935" r:id="rId34"/>
+    <p:sldId id="933" r:id="rId35"/>
+    <p:sldId id="320" r:id="rId36"/>
+    <p:sldId id="326" r:id="rId37"/>
+    <p:sldId id="321" r:id="rId38"/>
+    <p:sldId id="354" r:id="rId39"/>
+    <p:sldId id="322" r:id="rId40"/>
+    <p:sldId id="323" r:id="rId41"/>
+    <p:sldId id="355" r:id="rId42"/>
+    <p:sldId id="345" r:id="rId43"/>
+    <p:sldId id="337" r:id="rId44"/>
+    <p:sldId id="344" r:id="rId45"/>
+    <p:sldId id="343" r:id="rId46"/>
+    <p:sldId id="356" r:id="rId47"/>
+    <p:sldId id="338" r:id="rId48"/>
+    <p:sldId id="339" r:id="rId49"/>
+    <p:sldId id="340" r:id="rId50"/>
+    <p:sldId id="341" r:id="rId51"/>
+    <p:sldId id="342" r:id="rId52"/>
+    <p:sldId id="347" r:id="rId53"/>
+    <p:sldId id="348" r:id="rId54"/>
+    <p:sldId id="263" r:id="rId55"/>
+    <p:sldId id="815" r:id="rId56"/>
+    <p:sldId id="816" r:id="rId57"/>
+    <p:sldId id="817" r:id="rId58"/>
+    <p:sldId id="821" r:id="rId59"/>
+    <p:sldId id="357" r:id="rId60"/>
+    <p:sldId id="811" r:id="rId61"/>
+    <p:sldId id="812" r:id="rId62"/>
+    <p:sldId id="909" r:id="rId63"/>
+    <p:sldId id="930" r:id="rId64"/>
   </p:sldIdLst>
   <p:sldSz cx="12192000" cy="6858000"/>
   <p:notesSz cx="6858000" cy="9144000"/>
@@ -212,6 +213,7 @@
             <p14:sldId id="318"/>
             <p14:sldId id="325"/>
             <p14:sldId id="934"/>
+            <p14:sldId id="935"/>
             <p14:sldId id="933"/>
             <p14:sldId id="320"/>
             <p14:sldId id="326"/>
@@ -366,7 +368,7 @@
                 <a:latin typeface="맑은 고딕" panose="020B0503020000020004" pitchFamily="50" charset="-127"/>
                 <a:ea typeface="맑은 고딕" panose="020B0503020000020004" pitchFamily="50" charset="-127"/>
               </a:rPr>
-              <a:t>2026-04-16</a:t>
+              <a:t>2026-05-27</a:t>
             </a:fld>
             <a:endParaRPr lang="ko-KR" altLang="en-US">
               <a:latin typeface="맑은 고딕" panose="020B0503020000020004" pitchFamily="50" charset="-127"/>
@@ -552,7 +554,7 @@
           <a:p>
             <a:fld id="{43E1C3DD-4A19-441D-907C-380838DB51C4}" type="datetime1">
               <a:rPr lang="ko-KR" altLang="en-US" noProof="0" smtClean="0"/>
-              <a:t>2026-04-16</a:t>
+              <a:t>2026-05-27</a:t>
             </a:fld>
             <a:endParaRPr lang="ko-KR" altLang="en-US" noProof="0"/>
           </a:p>
@@ -3748,6 +3750,124 @@
         <p:cNvPr id="1" name="">
           <a:extLst>
             <a:ext uri="{FF2B5EF4-FFF2-40B4-BE49-F238E27FC236}">
+              <a16:creationId xmlns:a16="http://schemas.microsoft.com/office/drawing/2014/main" id="{F766A615-CA02-2C71-E35E-FA75ADB855B2}"/>
+            </a:ext>
+          </a:extLst>
+        </p:cNvPr>
+        <p:cNvGrpSpPr/>
+        <p:nvPr/>
+      </p:nvGrpSpPr>
+      <p:grpSpPr>
+        <a:xfrm>
+          <a:off x="0" y="0"/>
+          <a:ext cx="0" cy="0"/>
+          <a:chOff x="0" y="0"/>
+          <a:chExt cx="0" cy="0"/>
+        </a:xfrm>
+      </p:grpSpPr>
+      <p:sp>
+        <p:nvSpPr>
+          <p:cNvPr id="2" name="슬라이드 이미지 개체 틀 1">
+            <a:extLst>
+              <a:ext uri="{FF2B5EF4-FFF2-40B4-BE49-F238E27FC236}">
+                <a16:creationId xmlns:a16="http://schemas.microsoft.com/office/drawing/2014/main" id="{206B7F45-B906-5223-4922-76682F625128}"/>
+              </a:ext>
+            </a:extLst>
+          </p:cNvPr>
+          <p:cNvSpPr>
+            <a:spLocks noGrp="1" noRot="1" noChangeAspect="1"/>
+          </p:cNvSpPr>
+          <p:nvPr>
+            <p:ph type="sldImg"/>
+          </p:nvPr>
+        </p:nvSpPr>
+        <p:spPr/>
+      </p:sp>
+      <p:sp>
+        <p:nvSpPr>
+          <p:cNvPr id="3" name="슬라이드 노트 개체 틀 2">
+            <a:extLst>
+              <a:ext uri="{FF2B5EF4-FFF2-40B4-BE49-F238E27FC236}">
+                <a16:creationId xmlns:a16="http://schemas.microsoft.com/office/drawing/2014/main" id="{3A20D228-1D7A-E5DD-FB02-A0000295A714}"/>
+              </a:ext>
+            </a:extLst>
+          </p:cNvPr>
+          <p:cNvSpPr>
+            <a:spLocks noGrp="1"/>
+          </p:cNvSpPr>
+          <p:nvPr>
+            <p:ph type="body" idx="1"/>
+          </p:nvPr>
+        </p:nvSpPr>
+        <p:spPr/>
+        <p:txBody>
+          <a:bodyPr/>
+          <a:lstStyle/>
+          <a:p>
+            <a:endParaRPr lang="ko-KR" altLang="en-US">
+              <a:latin typeface="맑은 고딕" panose="020B0503020000020004" pitchFamily="50" charset="-127"/>
+              <a:ea typeface="맑은 고딕" panose="020B0503020000020004" pitchFamily="50" charset="-127"/>
+            </a:endParaRPr>
+          </a:p>
+        </p:txBody>
+      </p:sp>
+      <p:sp>
+        <p:nvSpPr>
+          <p:cNvPr id="4" name="슬라이드 번호 개체 틀 3">
+            <a:extLst>
+              <a:ext uri="{FF2B5EF4-FFF2-40B4-BE49-F238E27FC236}">
+                <a16:creationId xmlns:a16="http://schemas.microsoft.com/office/drawing/2014/main" id="{2F01BF6E-65D0-97B5-BB93-4EFB72B789D6}"/>
+              </a:ext>
+            </a:extLst>
+          </p:cNvPr>
+          <p:cNvSpPr>
+            <a:spLocks noGrp="1"/>
+          </p:cNvSpPr>
+          <p:nvPr>
+            <p:ph type="sldNum" sz="quarter" idx="5"/>
+          </p:nvPr>
+        </p:nvSpPr>
+        <p:spPr/>
+        <p:txBody>
+          <a:bodyPr/>
+          <a:lstStyle/>
+          <a:p>
+            <a:pPr rtl="0"/>
+            <a:fld id="{DF61EA0F-A667-4B49-8422-0062BC55E249}" type="slidenum">
+              <a:rPr lang="en-US" altLang="ko-KR" smtClean="0">
+                <a:latin typeface="맑은 고딕" panose="020B0503020000020004" pitchFamily="50" charset="-127"/>
+                <a:ea typeface="맑은 고딕" panose="020B0503020000020004" pitchFamily="50" charset="-127"/>
+              </a:rPr>
+              <a:t>33</a:t>
+            </a:fld>
+            <a:endParaRPr lang="ko-KR" altLang="en-US">
+              <a:latin typeface="맑은 고딕" panose="020B0503020000020004" pitchFamily="50" charset="-127"/>
+              <a:ea typeface="맑은 고딕" panose="020B0503020000020004" pitchFamily="50" charset="-127"/>
+            </a:endParaRPr>
+          </a:p>
+        </p:txBody>
+      </p:sp>
+    </p:spTree>
+    <p:extLst>
+      <p:ext uri="{BB962C8B-B14F-4D97-AF65-F5344CB8AC3E}">
+        <p14:creationId xmlns:p14="http://schemas.microsoft.com/office/powerpoint/2010/main" val="2166919573"/>
+      </p:ext>
+    </p:extLst>
+  </p:cSld>
+  <p:clrMapOvr>
+    <a:masterClrMapping/>
+  </p:clrMapOvr>
+</p:notes>
+</file>
+
+<file path=ppt/notesSlides/notesSlide33.xml><?xml version="1.0" encoding="utf-8"?>
+<p:notes xmlns:a="http://schemas.openxmlformats.org/drawingml/2006/main" xmlns:r="http://schemas.openxmlformats.org/officeDocument/2006/relationships" xmlns:p="http://schemas.openxmlformats.org/presentationml/2006/main">
+  <p:cSld>
+    <p:spTree>
+      <p:nvGrpSpPr>
+        <p:cNvPr id="1" name="">
+          <a:extLst>
+            <a:ext uri="{FF2B5EF4-FFF2-40B4-BE49-F238E27FC236}">
               <a16:creationId xmlns:a16="http://schemas.microsoft.com/office/drawing/2014/main" id="{D0897F7E-9BF3-61AF-1FBE-8C63D2E6DFEE}"/>
             </a:ext>
           </a:extLst>
@@ -3836,7 +3956,7 @@
                 <a:latin typeface="맑은 고딕" panose="020B0503020000020004" pitchFamily="50" charset="-127"/>
                 <a:ea typeface="맑은 고딕" panose="020B0503020000020004" pitchFamily="50" charset="-127"/>
               </a:rPr>
-              <a:t>33</a:t>
+              <a:t>34</a:t>
             </a:fld>
             <a:endParaRPr lang="ko-KR" altLang="en-US">
               <a:latin typeface="맑은 고딕" panose="020B0503020000020004" pitchFamily="50" charset="-127"/>
@@ -3858,7 +3978,7 @@
 </p:notes>
 </file>
 
-<file path=ppt/notesSlides/notesSlide33.xml><?xml version="1.0" encoding="utf-8"?>
+<file path=ppt/notesSlides/notesSlide34.xml><?xml version="1.0" encoding="utf-8"?>
 <p:notes xmlns:a="http://schemas.openxmlformats.org/drawingml/2006/main" xmlns:r="http://schemas.openxmlformats.org/officeDocument/2006/relationships" xmlns:p="http://schemas.openxmlformats.org/presentationml/2006/main">
   <p:cSld>
     <p:spTree>
@@ -3954,7 +4074,7 @@
                 <a:latin typeface="맑은 고딕" panose="020B0503020000020004" pitchFamily="50" charset="-127"/>
                 <a:ea typeface="맑은 고딕" panose="020B0503020000020004" pitchFamily="50" charset="-127"/>
               </a:rPr>
-              <a:t>34</a:t>
+              <a:t>35</a:t>
             </a:fld>
             <a:endParaRPr lang="ko-KR" altLang="en-US">
               <a:latin typeface="맑은 고딕" panose="020B0503020000020004" pitchFamily="50" charset="-127"/>
@@ -3976,7 +4096,7 @@
 </p:notes>
 </file>
 
-<file path=ppt/notesSlides/notesSlide34.xml><?xml version="1.0" encoding="utf-8"?>
+<file path=ppt/notesSlides/notesSlide35.xml><?xml version="1.0" encoding="utf-8"?>
 <p:notes xmlns:a="http://schemas.openxmlformats.org/drawingml/2006/main" xmlns:r="http://schemas.openxmlformats.org/officeDocument/2006/relationships" xmlns:p="http://schemas.openxmlformats.org/presentationml/2006/main">
   <p:cSld>
     <p:spTree>
@@ -4072,7 +4192,7 @@
                 <a:latin typeface="맑은 고딕" panose="020B0503020000020004" pitchFamily="50" charset="-127"/>
                 <a:ea typeface="맑은 고딕" panose="020B0503020000020004" pitchFamily="50" charset="-127"/>
               </a:rPr>
-              <a:t>35</a:t>
+              <a:t>36</a:t>
             </a:fld>
             <a:endParaRPr lang="ko-KR" altLang="en-US">
               <a:latin typeface="맑은 고딕" panose="020B0503020000020004" pitchFamily="50" charset="-127"/>
@@ -4094,7 +4214,7 @@
 </p:notes>
 </file>
 
-<file path=ppt/notesSlides/notesSlide35.xml><?xml version="1.0" encoding="utf-8"?>
+<file path=ppt/notesSlides/notesSlide36.xml><?xml version="1.0" encoding="utf-8"?>
 <p:notes xmlns:a="http://schemas.openxmlformats.org/drawingml/2006/main" xmlns:r="http://schemas.openxmlformats.org/officeDocument/2006/relationships" xmlns:p="http://schemas.openxmlformats.org/presentationml/2006/main">
   <p:cSld>
     <p:spTree>
@@ -4190,7 +4310,7 @@
                 <a:latin typeface="맑은 고딕" panose="020B0503020000020004" pitchFamily="50" charset="-127"/>
                 <a:ea typeface="맑은 고딕" panose="020B0503020000020004" pitchFamily="50" charset="-127"/>
               </a:rPr>
-              <a:t>36</a:t>
+              <a:t>37</a:t>
             </a:fld>
             <a:endParaRPr lang="ko-KR" altLang="en-US">
               <a:latin typeface="맑은 고딕" panose="020B0503020000020004" pitchFamily="50" charset="-127"/>
@@ -4212,7 +4332,7 @@
 </p:notes>
 </file>
 
-<file path=ppt/notesSlides/notesSlide36.xml><?xml version="1.0" encoding="utf-8"?>
+<file path=ppt/notesSlides/notesSlide37.xml><?xml version="1.0" encoding="utf-8"?>
 <p:notes xmlns:a="http://schemas.openxmlformats.org/drawingml/2006/main" xmlns:r="http://schemas.openxmlformats.org/officeDocument/2006/relationships" xmlns:p="http://schemas.openxmlformats.org/presentationml/2006/main">
   <p:cSld>
     <p:spTree>
@@ -4308,7 +4428,7 @@
                 <a:latin typeface="맑은 고딕" panose="020B0503020000020004" pitchFamily="50" charset="-127"/>
                 <a:ea typeface="맑은 고딕" panose="020B0503020000020004" pitchFamily="50" charset="-127"/>
               </a:rPr>
-              <a:t>37</a:t>
+              <a:t>38</a:t>
             </a:fld>
             <a:endParaRPr lang="ko-KR" altLang="en-US">
               <a:latin typeface="맑은 고딕" panose="020B0503020000020004" pitchFamily="50" charset="-127"/>
@@ -4330,7 +4450,7 @@
 </p:notes>
 </file>
 
-<file path=ppt/notesSlides/notesSlide37.xml><?xml version="1.0" encoding="utf-8"?>
+<file path=ppt/notesSlides/notesSlide38.xml><?xml version="1.0" encoding="utf-8"?>
 <p:notes xmlns:a="http://schemas.openxmlformats.org/drawingml/2006/main" xmlns:r="http://schemas.openxmlformats.org/officeDocument/2006/relationships" xmlns:p="http://schemas.openxmlformats.org/presentationml/2006/main">
   <p:cSld>
     <p:spTree>
@@ -4426,7 +4546,7 @@
                 <a:latin typeface="맑은 고딕" panose="020B0503020000020004" pitchFamily="50" charset="-127"/>
                 <a:ea typeface="맑은 고딕" panose="020B0503020000020004" pitchFamily="50" charset="-127"/>
               </a:rPr>
-              <a:t>38</a:t>
+              <a:t>39</a:t>
             </a:fld>
             <a:endParaRPr lang="ko-KR" altLang="en-US">
               <a:latin typeface="맑은 고딕" panose="020B0503020000020004" pitchFamily="50" charset="-127"/>
@@ -4448,7 +4568,7 @@
 </p:notes>
 </file>
 
-<file path=ppt/notesSlides/notesSlide38.xml><?xml version="1.0" encoding="utf-8"?>
+<file path=ppt/notesSlides/notesSlide39.xml><?xml version="1.0" encoding="utf-8"?>
 <p:notes xmlns:a="http://schemas.openxmlformats.org/drawingml/2006/main" xmlns:r="http://schemas.openxmlformats.org/officeDocument/2006/relationships" xmlns:p="http://schemas.openxmlformats.org/presentationml/2006/main">
   <p:cSld>
     <p:spTree>
@@ -4544,124 +4664,6 @@
                 <a:latin typeface="맑은 고딕" panose="020B0503020000020004" pitchFamily="50" charset="-127"/>
                 <a:ea typeface="맑은 고딕" panose="020B0503020000020004" pitchFamily="50" charset="-127"/>
               </a:rPr>
-              <a:t>39</a:t>
-            </a:fld>
-            <a:endParaRPr lang="ko-KR" altLang="en-US">
-              <a:latin typeface="맑은 고딕" panose="020B0503020000020004" pitchFamily="50" charset="-127"/>
-              <a:ea typeface="맑은 고딕" panose="020B0503020000020004" pitchFamily="50" charset="-127"/>
-            </a:endParaRPr>
-          </a:p>
-        </p:txBody>
-      </p:sp>
-    </p:spTree>
-    <p:extLst>
-      <p:ext uri="{BB962C8B-B14F-4D97-AF65-F5344CB8AC3E}">
-        <p14:creationId xmlns:p14="http://schemas.microsoft.com/office/powerpoint/2010/main" val="2224729383"/>
-      </p:ext>
-    </p:extLst>
-  </p:cSld>
-  <p:clrMapOvr>
-    <a:masterClrMapping/>
-  </p:clrMapOvr>
-</p:notes>
-</file>
-
-<file path=ppt/notesSlides/notesSlide39.xml><?xml version="1.0" encoding="utf-8"?>
-<p:notes xmlns:a="http://schemas.openxmlformats.org/drawingml/2006/main" xmlns:r="http://schemas.openxmlformats.org/officeDocument/2006/relationships" xmlns:p="http://schemas.openxmlformats.org/presentationml/2006/main">
-  <p:cSld>
-    <p:spTree>
-      <p:nvGrpSpPr>
-        <p:cNvPr id="1" name="">
-          <a:extLst>
-            <a:ext uri="{FF2B5EF4-FFF2-40B4-BE49-F238E27FC236}">
-              <a16:creationId xmlns:a16="http://schemas.microsoft.com/office/drawing/2014/main" id="{04EC7A59-E5AC-B1ED-DE55-A1BA264B7C0E}"/>
-            </a:ext>
-          </a:extLst>
-        </p:cNvPr>
-        <p:cNvGrpSpPr/>
-        <p:nvPr/>
-      </p:nvGrpSpPr>
-      <p:grpSpPr>
-        <a:xfrm>
-          <a:off x="0" y="0"/>
-          <a:ext cx="0" cy="0"/>
-          <a:chOff x="0" y="0"/>
-          <a:chExt cx="0" cy="0"/>
-        </a:xfrm>
-      </p:grpSpPr>
-      <p:sp>
-        <p:nvSpPr>
-          <p:cNvPr id="2" name="슬라이드 이미지 개체 틀 1">
-            <a:extLst>
-              <a:ext uri="{FF2B5EF4-FFF2-40B4-BE49-F238E27FC236}">
-                <a16:creationId xmlns:a16="http://schemas.microsoft.com/office/drawing/2014/main" id="{BB2D7C13-2961-18D4-1CD0-B19FAFF547A7}"/>
-              </a:ext>
-            </a:extLst>
-          </p:cNvPr>
-          <p:cNvSpPr>
-            <a:spLocks noGrp="1" noRot="1" noChangeAspect="1"/>
-          </p:cNvSpPr>
-          <p:nvPr>
-            <p:ph type="sldImg"/>
-          </p:nvPr>
-        </p:nvSpPr>
-        <p:spPr/>
-      </p:sp>
-      <p:sp>
-        <p:nvSpPr>
-          <p:cNvPr id="3" name="슬라이드 노트 개체 틀 2">
-            <a:extLst>
-              <a:ext uri="{FF2B5EF4-FFF2-40B4-BE49-F238E27FC236}">
-                <a16:creationId xmlns:a16="http://schemas.microsoft.com/office/drawing/2014/main" id="{A2A29A1D-2C0B-048A-B0BB-649A2053588C}"/>
-              </a:ext>
-            </a:extLst>
-          </p:cNvPr>
-          <p:cNvSpPr>
-            <a:spLocks noGrp="1"/>
-          </p:cNvSpPr>
-          <p:nvPr>
-            <p:ph type="body" idx="1"/>
-          </p:nvPr>
-        </p:nvSpPr>
-        <p:spPr/>
-        <p:txBody>
-          <a:bodyPr/>
-          <a:lstStyle/>
-          <a:p>
-            <a:endParaRPr lang="ko-KR" altLang="en-US">
-              <a:latin typeface="맑은 고딕" panose="020B0503020000020004" pitchFamily="50" charset="-127"/>
-              <a:ea typeface="맑은 고딕" panose="020B0503020000020004" pitchFamily="50" charset="-127"/>
-            </a:endParaRPr>
-          </a:p>
-        </p:txBody>
-      </p:sp>
-      <p:sp>
-        <p:nvSpPr>
-          <p:cNvPr id="4" name="슬라이드 번호 개체 틀 3">
-            <a:extLst>
-              <a:ext uri="{FF2B5EF4-FFF2-40B4-BE49-F238E27FC236}">
-                <a16:creationId xmlns:a16="http://schemas.microsoft.com/office/drawing/2014/main" id="{56EA4E76-C07C-A9A8-FD9B-58607D36AE05}"/>
-              </a:ext>
-            </a:extLst>
-          </p:cNvPr>
-          <p:cNvSpPr>
-            <a:spLocks noGrp="1"/>
-          </p:cNvSpPr>
-          <p:nvPr>
-            <p:ph type="sldNum" sz="quarter" idx="5"/>
-          </p:nvPr>
-        </p:nvSpPr>
-        <p:spPr/>
-        <p:txBody>
-          <a:bodyPr/>
-          <a:lstStyle/>
-          <a:p>
-            <a:pPr rtl="0"/>
-            <a:fld id="{DF61EA0F-A667-4B49-8422-0062BC55E249}" type="slidenum">
-              <a:rPr lang="en-US" altLang="ko-KR" smtClean="0">
-                <a:latin typeface="맑은 고딕" panose="020B0503020000020004" pitchFamily="50" charset="-127"/>
-                <a:ea typeface="맑은 고딕" panose="020B0503020000020004" pitchFamily="50" charset="-127"/>
-              </a:rPr>
               <a:t>40</a:t>
             </a:fld>
             <a:endParaRPr lang="ko-KR" altLang="en-US">
@@ -4674,7 +4676,7 @@
     </p:spTree>
     <p:extLst>
       <p:ext uri="{BB962C8B-B14F-4D97-AF65-F5344CB8AC3E}">
-        <p14:creationId xmlns:p14="http://schemas.microsoft.com/office/powerpoint/2010/main" val="159102650"/>
+        <p14:creationId xmlns:p14="http://schemas.microsoft.com/office/powerpoint/2010/main" val="2224729383"/>
       </p:ext>
     </p:extLst>
   </p:cSld>
@@ -4810,6 +4812,124 @@
         <p:cNvPr id="1" name="">
           <a:extLst>
             <a:ext uri="{FF2B5EF4-FFF2-40B4-BE49-F238E27FC236}">
+              <a16:creationId xmlns:a16="http://schemas.microsoft.com/office/drawing/2014/main" id="{04EC7A59-E5AC-B1ED-DE55-A1BA264B7C0E}"/>
+            </a:ext>
+          </a:extLst>
+        </p:cNvPr>
+        <p:cNvGrpSpPr/>
+        <p:nvPr/>
+      </p:nvGrpSpPr>
+      <p:grpSpPr>
+        <a:xfrm>
+          <a:off x="0" y="0"/>
+          <a:ext cx="0" cy="0"/>
+          <a:chOff x="0" y="0"/>
+          <a:chExt cx="0" cy="0"/>
+        </a:xfrm>
+      </p:grpSpPr>
+      <p:sp>
+        <p:nvSpPr>
+          <p:cNvPr id="2" name="슬라이드 이미지 개체 틀 1">
+            <a:extLst>
+              <a:ext uri="{FF2B5EF4-FFF2-40B4-BE49-F238E27FC236}">
+                <a16:creationId xmlns:a16="http://schemas.microsoft.com/office/drawing/2014/main" id="{BB2D7C13-2961-18D4-1CD0-B19FAFF547A7}"/>
+              </a:ext>
+            </a:extLst>
+          </p:cNvPr>
+          <p:cNvSpPr>
+            <a:spLocks noGrp="1" noRot="1" noChangeAspect="1"/>
+          </p:cNvSpPr>
+          <p:nvPr>
+            <p:ph type="sldImg"/>
+          </p:nvPr>
+        </p:nvSpPr>
+        <p:spPr/>
+      </p:sp>
+      <p:sp>
+        <p:nvSpPr>
+          <p:cNvPr id="3" name="슬라이드 노트 개체 틀 2">
+            <a:extLst>
+              <a:ext uri="{FF2B5EF4-FFF2-40B4-BE49-F238E27FC236}">
+                <a16:creationId xmlns:a16="http://schemas.microsoft.com/office/drawing/2014/main" id="{A2A29A1D-2C0B-048A-B0BB-649A2053588C}"/>
+              </a:ext>
+            </a:extLst>
+          </p:cNvPr>
+          <p:cNvSpPr>
+            <a:spLocks noGrp="1"/>
+          </p:cNvSpPr>
+          <p:nvPr>
+            <p:ph type="body" idx="1"/>
+          </p:nvPr>
+        </p:nvSpPr>
+        <p:spPr/>
+        <p:txBody>
+          <a:bodyPr/>
+          <a:lstStyle/>
+          <a:p>
+            <a:endParaRPr lang="ko-KR" altLang="en-US">
+              <a:latin typeface="맑은 고딕" panose="020B0503020000020004" pitchFamily="50" charset="-127"/>
+              <a:ea typeface="맑은 고딕" panose="020B0503020000020004" pitchFamily="50" charset="-127"/>
+            </a:endParaRPr>
+          </a:p>
+        </p:txBody>
+      </p:sp>
+      <p:sp>
+        <p:nvSpPr>
+          <p:cNvPr id="4" name="슬라이드 번호 개체 틀 3">
+            <a:extLst>
+              <a:ext uri="{FF2B5EF4-FFF2-40B4-BE49-F238E27FC236}">
+                <a16:creationId xmlns:a16="http://schemas.microsoft.com/office/drawing/2014/main" id="{56EA4E76-C07C-A9A8-FD9B-58607D36AE05}"/>
+              </a:ext>
+            </a:extLst>
+          </p:cNvPr>
+          <p:cNvSpPr>
+            <a:spLocks noGrp="1"/>
+          </p:cNvSpPr>
+          <p:nvPr>
+            <p:ph type="sldNum" sz="quarter" idx="5"/>
+          </p:nvPr>
+        </p:nvSpPr>
+        <p:spPr/>
+        <p:txBody>
+          <a:bodyPr/>
+          <a:lstStyle/>
+          <a:p>
+            <a:pPr rtl="0"/>
+            <a:fld id="{DF61EA0F-A667-4B49-8422-0062BC55E249}" type="slidenum">
+              <a:rPr lang="en-US" altLang="ko-KR" smtClean="0">
+                <a:latin typeface="맑은 고딕" panose="020B0503020000020004" pitchFamily="50" charset="-127"/>
+                <a:ea typeface="맑은 고딕" panose="020B0503020000020004" pitchFamily="50" charset="-127"/>
+              </a:rPr>
+              <a:t>41</a:t>
+            </a:fld>
+            <a:endParaRPr lang="ko-KR" altLang="en-US">
+              <a:latin typeface="맑은 고딕" panose="020B0503020000020004" pitchFamily="50" charset="-127"/>
+              <a:ea typeface="맑은 고딕" panose="020B0503020000020004" pitchFamily="50" charset="-127"/>
+            </a:endParaRPr>
+          </a:p>
+        </p:txBody>
+      </p:sp>
+    </p:spTree>
+    <p:extLst>
+      <p:ext uri="{BB962C8B-B14F-4D97-AF65-F5344CB8AC3E}">
+        <p14:creationId xmlns:p14="http://schemas.microsoft.com/office/powerpoint/2010/main" val="159102650"/>
+      </p:ext>
+    </p:extLst>
+  </p:cSld>
+  <p:clrMapOvr>
+    <a:masterClrMapping/>
+  </p:clrMapOvr>
+</p:notes>
+</file>
+
+<file path=ppt/notesSlides/notesSlide41.xml><?xml version="1.0" encoding="utf-8"?>
+<p:notes xmlns:a="http://schemas.openxmlformats.org/drawingml/2006/main" xmlns:r="http://schemas.openxmlformats.org/officeDocument/2006/relationships" xmlns:p="http://schemas.openxmlformats.org/presentationml/2006/main">
+  <p:cSld>
+    <p:spTree>
+      <p:nvGrpSpPr>
+        <p:cNvPr id="1" name="">
+          <a:extLst>
+            <a:ext uri="{FF2B5EF4-FFF2-40B4-BE49-F238E27FC236}">
               <a16:creationId xmlns:a16="http://schemas.microsoft.com/office/drawing/2014/main" id="{838D4029-41C4-F0DF-9167-C90D2D86C115}"/>
             </a:ext>
           </a:extLst>
@@ -4898,7 +5018,7 @@
                 <a:latin typeface="맑은 고딕" panose="020B0503020000020004" pitchFamily="50" charset="-127"/>
                 <a:ea typeface="맑은 고딕" panose="020B0503020000020004" pitchFamily="50" charset="-127"/>
               </a:rPr>
-              <a:t>41</a:t>
+              <a:t>42</a:t>
             </a:fld>
             <a:endParaRPr lang="ko-KR" altLang="en-US">
               <a:latin typeface="맑은 고딕" panose="020B0503020000020004" pitchFamily="50" charset="-127"/>
@@ -4920,7 +5040,7 @@
 </p:notes>
 </file>
 
-<file path=ppt/notesSlides/notesSlide41.xml><?xml version="1.0" encoding="utf-8"?>
+<file path=ppt/notesSlides/notesSlide42.xml><?xml version="1.0" encoding="utf-8"?>
 <p:notes xmlns:a="http://schemas.openxmlformats.org/drawingml/2006/main" xmlns:r="http://schemas.openxmlformats.org/officeDocument/2006/relationships" xmlns:p="http://schemas.openxmlformats.org/presentationml/2006/main">
   <p:cSld>
     <p:spTree>
@@ -5016,7 +5136,7 @@
                 <a:latin typeface="맑은 고딕" panose="020B0503020000020004" pitchFamily="50" charset="-127"/>
                 <a:ea typeface="맑은 고딕" panose="020B0503020000020004" pitchFamily="50" charset="-127"/>
               </a:rPr>
-              <a:t>42</a:t>
+              <a:t>43</a:t>
             </a:fld>
             <a:endParaRPr lang="ko-KR" altLang="en-US">
               <a:latin typeface="맑은 고딕" panose="020B0503020000020004" pitchFamily="50" charset="-127"/>
@@ -5038,7 +5158,7 @@
 </p:notes>
 </file>
 
-<file path=ppt/notesSlides/notesSlide42.xml><?xml version="1.0" encoding="utf-8"?>
+<file path=ppt/notesSlides/notesSlide43.xml><?xml version="1.0" encoding="utf-8"?>
 <p:notes xmlns:a="http://schemas.openxmlformats.org/drawingml/2006/main" xmlns:r="http://schemas.openxmlformats.org/officeDocument/2006/relationships" xmlns:p="http://schemas.openxmlformats.org/presentationml/2006/main">
   <p:cSld>
     <p:spTree>
@@ -5134,7 +5254,7 @@
                 <a:latin typeface="맑은 고딕" panose="020B0503020000020004" pitchFamily="50" charset="-127"/>
                 <a:ea typeface="맑은 고딕" panose="020B0503020000020004" pitchFamily="50" charset="-127"/>
               </a:rPr>
-              <a:t>43</a:t>
+              <a:t>44</a:t>
             </a:fld>
             <a:endParaRPr lang="ko-KR" altLang="en-US">
               <a:latin typeface="맑은 고딕" panose="020B0503020000020004" pitchFamily="50" charset="-127"/>
@@ -5156,7 +5276,7 @@
 </p:notes>
 </file>
 
-<file path=ppt/notesSlides/notesSlide43.xml><?xml version="1.0" encoding="utf-8"?>
+<file path=ppt/notesSlides/notesSlide44.xml><?xml version="1.0" encoding="utf-8"?>
 <p:notes xmlns:a="http://schemas.openxmlformats.org/drawingml/2006/main" xmlns:r="http://schemas.openxmlformats.org/officeDocument/2006/relationships" xmlns:p="http://schemas.openxmlformats.org/presentationml/2006/main">
   <p:cSld>
     <p:spTree>
@@ -5252,7 +5372,7 @@
                 <a:latin typeface="맑은 고딕" panose="020B0503020000020004" pitchFamily="50" charset="-127"/>
                 <a:ea typeface="맑은 고딕" panose="020B0503020000020004" pitchFamily="50" charset="-127"/>
               </a:rPr>
-              <a:t>44</a:t>
+              <a:t>45</a:t>
             </a:fld>
             <a:endParaRPr lang="ko-KR" altLang="en-US">
               <a:latin typeface="맑은 고딕" panose="020B0503020000020004" pitchFamily="50" charset="-127"/>
@@ -5274,7 +5394,7 @@
 </p:notes>
 </file>
 
-<file path=ppt/notesSlides/notesSlide44.xml><?xml version="1.0" encoding="utf-8"?>
+<file path=ppt/notesSlides/notesSlide45.xml><?xml version="1.0" encoding="utf-8"?>
 <p:notes xmlns:a="http://schemas.openxmlformats.org/drawingml/2006/main" xmlns:r="http://schemas.openxmlformats.org/officeDocument/2006/relationships" xmlns:p="http://schemas.openxmlformats.org/presentationml/2006/main">
   <p:cSld>
     <p:spTree>
@@ -5370,7 +5490,7 @@
                 <a:latin typeface="맑은 고딕" panose="020B0503020000020004" pitchFamily="50" charset="-127"/>
                 <a:ea typeface="맑은 고딕" panose="020B0503020000020004" pitchFamily="50" charset="-127"/>
               </a:rPr>
-              <a:t>45</a:t>
+              <a:t>46</a:t>
             </a:fld>
             <a:endParaRPr lang="ko-KR" altLang="en-US">
               <a:latin typeface="맑은 고딕" panose="020B0503020000020004" pitchFamily="50" charset="-127"/>
@@ -5392,7 +5512,7 @@
 </p:notes>
 </file>
 
-<file path=ppt/notesSlides/notesSlide45.xml><?xml version="1.0" encoding="utf-8"?>
+<file path=ppt/notesSlides/notesSlide46.xml><?xml version="1.0" encoding="utf-8"?>
 <p:notes xmlns:a="http://schemas.openxmlformats.org/drawingml/2006/main" xmlns:r="http://schemas.openxmlformats.org/officeDocument/2006/relationships" xmlns:p="http://schemas.openxmlformats.org/presentationml/2006/main">
   <p:cSld>
     <p:spTree>
@@ -5488,7 +5608,7 @@
                 <a:latin typeface="맑은 고딕" panose="020B0503020000020004" pitchFamily="50" charset="-127"/>
                 <a:ea typeface="맑은 고딕" panose="020B0503020000020004" pitchFamily="50" charset="-127"/>
               </a:rPr>
-              <a:t>46</a:t>
+              <a:t>47</a:t>
             </a:fld>
             <a:endParaRPr lang="ko-KR" altLang="en-US">
               <a:latin typeface="맑은 고딕" panose="020B0503020000020004" pitchFamily="50" charset="-127"/>
@@ -5510,7 +5630,7 @@
 </p:notes>
 </file>
 
-<file path=ppt/notesSlides/notesSlide46.xml><?xml version="1.0" encoding="utf-8"?>
+<file path=ppt/notesSlides/notesSlide47.xml><?xml version="1.0" encoding="utf-8"?>
 <p:notes xmlns:a="http://schemas.openxmlformats.org/drawingml/2006/main" xmlns:r="http://schemas.openxmlformats.org/officeDocument/2006/relationships" xmlns:p="http://schemas.openxmlformats.org/presentationml/2006/main">
   <p:cSld>
     <p:spTree>
@@ -5606,7 +5726,7 @@
                 <a:latin typeface="맑은 고딕" panose="020B0503020000020004" pitchFamily="50" charset="-127"/>
                 <a:ea typeface="맑은 고딕" panose="020B0503020000020004" pitchFamily="50" charset="-127"/>
               </a:rPr>
-              <a:t>47</a:t>
+              <a:t>48</a:t>
             </a:fld>
             <a:endParaRPr lang="ko-KR" altLang="en-US">
               <a:latin typeface="맑은 고딕" panose="020B0503020000020004" pitchFamily="50" charset="-127"/>
@@ -5628,7 +5748,7 @@
 </p:notes>
 </file>
 
-<file path=ppt/notesSlides/notesSlide47.xml><?xml version="1.0" encoding="utf-8"?>
+<file path=ppt/notesSlides/notesSlide48.xml><?xml version="1.0" encoding="utf-8"?>
 <p:notes xmlns:a="http://schemas.openxmlformats.org/drawingml/2006/main" xmlns:r="http://schemas.openxmlformats.org/officeDocument/2006/relationships" xmlns:p="http://schemas.openxmlformats.org/presentationml/2006/main">
   <p:cSld>
     <p:spTree>
@@ -5724,7 +5844,7 @@
                 <a:latin typeface="맑은 고딕" panose="020B0503020000020004" pitchFamily="50" charset="-127"/>
                 <a:ea typeface="맑은 고딕" panose="020B0503020000020004" pitchFamily="50" charset="-127"/>
               </a:rPr>
-              <a:t>48</a:t>
+              <a:t>49</a:t>
             </a:fld>
             <a:endParaRPr lang="ko-KR" altLang="en-US">
               <a:latin typeface="맑은 고딕" panose="020B0503020000020004" pitchFamily="50" charset="-127"/>
@@ -5746,7 +5866,7 @@
 </p:notes>
 </file>
 
-<file path=ppt/notesSlides/notesSlide48.xml><?xml version="1.0" encoding="utf-8"?>
+<file path=ppt/notesSlides/notesSlide49.xml><?xml version="1.0" encoding="utf-8"?>
 <p:notes xmlns:a="http://schemas.openxmlformats.org/drawingml/2006/main" xmlns:r="http://schemas.openxmlformats.org/officeDocument/2006/relationships" xmlns:p="http://schemas.openxmlformats.org/presentationml/2006/main">
   <p:cSld>
     <p:spTree>
@@ -5842,124 +5962,6 @@
                 <a:latin typeface="맑은 고딕" panose="020B0503020000020004" pitchFamily="50" charset="-127"/>
                 <a:ea typeface="맑은 고딕" panose="020B0503020000020004" pitchFamily="50" charset="-127"/>
               </a:rPr>
-              <a:t>49</a:t>
-            </a:fld>
-            <a:endParaRPr lang="ko-KR" altLang="en-US">
-              <a:latin typeface="맑은 고딕" panose="020B0503020000020004" pitchFamily="50" charset="-127"/>
-              <a:ea typeface="맑은 고딕" panose="020B0503020000020004" pitchFamily="50" charset="-127"/>
-            </a:endParaRPr>
-          </a:p>
-        </p:txBody>
-      </p:sp>
-    </p:spTree>
-    <p:extLst>
-      <p:ext uri="{BB962C8B-B14F-4D97-AF65-F5344CB8AC3E}">
-        <p14:creationId xmlns:p14="http://schemas.microsoft.com/office/powerpoint/2010/main" val="2946124820"/>
-      </p:ext>
-    </p:extLst>
-  </p:cSld>
-  <p:clrMapOvr>
-    <a:masterClrMapping/>
-  </p:clrMapOvr>
-</p:notes>
-</file>
-
-<file path=ppt/notesSlides/notesSlide49.xml><?xml version="1.0" encoding="utf-8"?>
-<p:notes xmlns:a="http://schemas.openxmlformats.org/drawingml/2006/main" xmlns:r="http://schemas.openxmlformats.org/officeDocument/2006/relationships" xmlns:p="http://schemas.openxmlformats.org/presentationml/2006/main">
-  <p:cSld>
-    <p:spTree>
-      <p:nvGrpSpPr>
-        <p:cNvPr id="1" name="">
-          <a:extLst>
-            <a:ext uri="{FF2B5EF4-FFF2-40B4-BE49-F238E27FC236}">
-              <a16:creationId xmlns:a16="http://schemas.microsoft.com/office/drawing/2014/main" id="{072F6BBD-4AD6-43BC-1332-8649FA0F265C}"/>
-            </a:ext>
-          </a:extLst>
-        </p:cNvPr>
-        <p:cNvGrpSpPr/>
-        <p:nvPr/>
-      </p:nvGrpSpPr>
-      <p:grpSpPr>
-        <a:xfrm>
-          <a:off x="0" y="0"/>
-          <a:ext cx="0" cy="0"/>
-          <a:chOff x="0" y="0"/>
-          <a:chExt cx="0" cy="0"/>
-        </a:xfrm>
-      </p:grpSpPr>
-      <p:sp>
-        <p:nvSpPr>
-          <p:cNvPr id="2" name="슬라이드 이미지 개체 틀 1">
-            <a:extLst>
-              <a:ext uri="{FF2B5EF4-FFF2-40B4-BE49-F238E27FC236}">
-                <a16:creationId xmlns:a16="http://schemas.microsoft.com/office/drawing/2014/main" id="{722FFEC0-339A-C35A-B0D8-C7842147B429}"/>
-              </a:ext>
-            </a:extLst>
-          </p:cNvPr>
-          <p:cNvSpPr>
-            <a:spLocks noGrp="1" noRot="1" noChangeAspect="1"/>
-          </p:cNvSpPr>
-          <p:nvPr>
-            <p:ph type="sldImg"/>
-          </p:nvPr>
-        </p:nvSpPr>
-        <p:spPr/>
-      </p:sp>
-      <p:sp>
-        <p:nvSpPr>
-          <p:cNvPr id="3" name="슬라이드 노트 개체 틀 2">
-            <a:extLst>
-              <a:ext uri="{FF2B5EF4-FFF2-40B4-BE49-F238E27FC236}">
-                <a16:creationId xmlns:a16="http://schemas.microsoft.com/office/drawing/2014/main" id="{F96A544E-6C05-95B3-233B-9B7289516616}"/>
-              </a:ext>
-            </a:extLst>
-          </p:cNvPr>
-          <p:cNvSpPr>
-            <a:spLocks noGrp="1"/>
-          </p:cNvSpPr>
-          <p:nvPr>
-            <p:ph type="body" idx="1"/>
-          </p:nvPr>
-        </p:nvSpPr>
-        <p:spPr/>
-        <p:txBody>
-          <a:bodyPr/>
-          <a:lstStyle/>
-          <a:p>
-            <a:endParaRPr lang="ko-KR" altLang="en-US">
-              <a:latin typeface="맑은 고딕" panose="020B0503020000020004" pitchFamily="50" charset="-127"/>
-              <a:ea typeface="맑은 고딕" panose="020B0503020000020004" pitchFamily="50" charset="-127"/>
-            </a:endParaRPr>
-          </a:p>
-        </p:txBody>
-      </p:sp>
-      <p:sp>
-        <p:nvSpPr>
-          <p:cNvPr id="4" name="슬라이드 번호 개체 틀 3">
-            <a:extLst>
-              <a:ext uri="{FF2B5EF4-FFF2-40B4-BE49-F238E27FC236}">
-                <a16:creationId xmlns:a16="http://schemas.microsoft.com/office/drawing/2014/main" id="{175D54AA-5EFD-95CB-5333-3ED1D0C9E989}"/>
-              </a:ext>
-            </a:extLst>
-          </p:cNvPr>
-          <p:cNvSpPr>
-            <a:spLocks noGrp="1"/>
-          </p:cNvSpPr>
-          <p:nvPr>
-            <p:ph type="sldNum" sz="quarter" idx="5"/>
-          </p:nvPr>
-        </p:nvSpPr>
-        <p:spPr/>
-        <p:txBody>
-          <a:bodyPr/>
-          <a:lstStyle/>
-          <a:p>
-            <a:pPr rtl="0"/>
-            <a:fld id="{DF61EA0F-A667-4B49-8422-0062BC55E249}" type="slidenum">
-              <a:rPr lang="en-US" altLang="ko-KR" smtClean="0">
-                <a:latin typeface="맑은 고딕" panose="020B0503020000020004" pitchFamily="50" charset="-127"/>
-                <a:ea typeface="맑은 고딕" panose="020B0503020000020004" pitchFamily="50" charset="-127"/>
-              </a:rPr>
               <a:t>50</a:t>
             </a:fld>
             <a:endParaRPr lang="ko-KR" altLang="en-US">
@@ -5972,7 +5974,7 @@
     </p:spTree>
     <p:extLst>
       <p:ext uri="{BB962C8B-B14F-4D97-AF65-F5344CB8AC3E}">
-        <p14:creationId xmlns:p14="http://schemas.microsoft.com/office/powerpoint/2010/main" val="3706368107"/>
+        <p14:creationId xmlns:p14="http://schemas.microsoft.com/office/powerpoint/2010/main" val="2946124820"/>
       </p:ext>
     </p:extLst>
   </p:cSld>
@@ -6108,6 +6110,124 @@
         <p:cNvPr id="1" name="">
           <a:extLst>
             <a:ext uri="{FF2B5EF4-FFF2-40B4-BE49-F238E27FC236}">
+              <a16:creationId xmlns:a16="http://schemas.microsoft.com/office/drawing/2014/main" id="{072F6BBD-4AD6-43BC-1332-8649FA0F265C}"/>
+            </a:ext>
+          </a:extLst>
+        </p:cNvPr>
+        <p:cNvGrpSpPr/>
+        <p:nvPr/>
+      </p:nvGrpSpPr>
+      <p:grpSpPr>
+        <a:xfrm>
+          <a:off x="0" y="0"/>
+          <a:ext cx="0" cy="0"/>
+          <a:chOff x="0" y="0"/>
+          <a:chExt cx="0" cy="0"/>
+        </a:xfrm>
+      </p:grpSpPr>
+      <p:sp>
+        <p:nvSpPr>
+          <p:cNvPr id="2" name="슬라이드 이미지 개체 틀 1">
+            <a:extLst>
+              <a:ext uri="{FF2B5EF4-FFF2-40B4-BE49-F238E27FC236}">
+                <a16:creationId xmlns:a16="http://schemas.microsoft.com/office/drawing/2014/main" id="{722FFEC0-339A-C35A-B0D8-C7842147B429}"/>
+              </a:ext>
+            </a:extLst>
+          </p:cNvPr>
+          <p:cNvSpPr>
+            <a:spLocks noGrp="1" noRot="1" noChangeAspect="1"/>
+          </p:cNvSpPr>
+          <p:nvPr>
+            <p:ph type="sldImg"/>
+          </p:nvPr>
+        </p:nvSpPr>
+        <p:spPr/>
+      </p:sp>
+      <p:sp>
+        <p:nvSpPr>
+          <p:cNvPr id="3" name="슬라이드 노트 개체 틀 2">
+            <a:extLst>
+              <a:ext uri="{FF2B5EF4-FFF2-40B4-BE49-F238E27FC236}">
+                <a16:creationId xmlns:a16="http://schemas.microsoft.com/office/drawing/2014/main" id="{F96A544E-6C05-95B3-233B-9B7289516616}"/>
+              </a:ext>
+            </a:extLst>
+          </p:cNvPr>
+          <p:cNvSpPr>
+            <a:spLocks noGrp="1"/>
+          </p:cNvSpPr>
+          <p:nvPr>
+            <p:ph type="body" idx="1"/>
+          </p:nvPr>
+        </p:nvSpPr>
+        <p:spPr/>
+        <p:txBody>
+          <a:bodyPr/>
+          <a:lstStyle/>
+          <a:p>
+            <a:endParaRPr lang="ko-KR" altLang="en-US">
+              <a:latin typeface="맑은 고딕" panose="020B0503020000020004" pitchFamily="50" charset="-127"/>
+              <a:ea typeface="맑은 고딕" panose="020B0503020000020004" pitchFamily="50" charset="-127"/>
+            </a:endParaRPr>
+          </a:p>
+        </p:txBody>
+      </p:sp>
+      <p:sp>
+        <p:nvSpPr>
+          <p:cNvPr id="4" name="슬라이드 번호 개체 틀 3">
+            <a:extLst>
+              <a:ext uri="{FF2B5EF4-FFF2-40B4-BE49-F238E27FC236}">
+                <a16:creationId xmlns:a16="http://schemas.microsoft.com/office/drawing/2014/main" id="{175D54AA-5EFD-95CB-5333-3ED1D0C9E989}"/>
+              </a:ext>
+            </a:extLst>
+          </p:cNvPr>
+          <p:cNvSpPr>
+            <a:spLocks noGrp="1"/>
+          </p:cNvSpPr>
+          <p:nvPr>
+            <p:ph type="sldNum" sz="quarter" idx="5"/>
+          </p:nvPr>
+        </p:nvSpPr>
+        <p:spPr/>
+        <p:txBody>
+          <a:bodyPr/>
+          <a:lstStyle/>
+          <a:p>
+            <a:pPr rtl="0"/>
+            <a:fld id="{DF61EA0F-A667-4B49-8422-0062BC55E249}" type="slidenum">
+              <a:rPr lang="en-US" altLang="ko-KR" smtClean="0">
+                <a:latin typeface="맑은 고딕" panose="020B0503020000020004" pitchFamily="50" charset="-127"/>
+                <a:ea typeface="맑은 고딕" panose="020B0503020000020004" pitchFamily="50" charset="-127"/>
+              </a:rPr>
+              <a:t>51</a:t>
+            </a:fld>
+            <a:endParaRPr lang="ko-KR" altLang="en-US">
+              <a:latin typeface="맑은 고딕" panose="020B0503020000020004" pitchFamily="50" charset="-127"/>
+              <a:ea typeface="맑은 고딕" panose="020B0503020000020004" pitchFamily="50" charset="-127"/>
+            </a:endParaRPr>
+          </a:p>
+        </p:txBody>
+      </p:sp>
+    </p:spTree>
+    <p:extLst>
+      <p:ext uri="{BB962C8B-B14F-4D97-AF65-F5344CB8AC3E}">
+        <p14:creationId xmlns:p14="http://schemas.microsoft.com/office/powerpoint/2010/main" val="3706368107"/>
+      </p:ext>
+    </p:extLst>
+  </p:cSld>
+  <p:clrMapOvr>
+    <a:masterClrMapping/>
+  </p:clrMapOvr>
+</p:notes>
+</file>
+
+<file path=ppt/notesSlides/notesSlide51.xml><?xml version="1.0" encoding="utf-8"?>
+<p:notes xmlns:a="http://schemas.openxmlformats.org/drawingml/2006/main" xmlns:r="http://schemas.openxmlformats.org/officeDocument/2006/relationships" xmlns:p="http://schemas.openxmlformats.org/presentationml/2006/main">
+  <p:cSld>
+    <p:spTree>
+      <p:nvGrpSpPr>
+        <p:cNvPr id="1" name="">
+          <a:extLst>
+            <a:ext uri="{FF2B5EF4-FFF2-40B4-BE49-F238E27FC236}">
               <a16:creationId xmlns:a16="http://schemas.microsoft.com/office/drawing/2014/main" id="{4E2DE17A-73EE-6F4B-BA44-E024FC1DD2CA}"/>
             </a:ext>
           </a:extLst>
@@ -6196,7 +6316,7 @@
                 <a:latin typeface="맑은 고딕" panose="020B0503020000020004" pitchFamily="50" charset="-127"/>
                 <a:ea typeface="맑은 고딕" panose="020B0503020000020004" pitchFamily="50" charset="-127"/>
               </a:rPr>
-              <a:t>51</a:t>
+              <a:t>52</a:t>
             </a:fld>
             <a:endParaRPr lang="ko-KR" altLang="en-US">
               <a:latin typeface="맑은 고딕" panose="020B0503020000020004" pitchFamily="50" charset="-127"/>
@@ -6218,7 +6338,7 @@
 </p:notes>
 </file>
 
-<file path=ppt/notesSlides/notesSlide51.xml><?xml version="1.0" encoding="utf-8"?>
+<file path=ppt/notesSlides/notesSlide52.xml><?xml version="1.0" encoding="utf-8"?>
 <p:notes xmlns:a="http://schemas.openxmlformats.org/drawingml/2006/main" xmlns:r="http://schemas.openxmlformats.org/officeDocument/2006/relationships" xmlns:p="http://schemas.openxmlformats.org/presentationml/2006/main">
   <p:cSld>
     <p:spTree>
@@ -6314,7 +6434,7 @@
                 <a:latin typeface="맑은 고딕" panose="020B0503020000020004" pitchFamily="50" charset="-127"/>
                 <a:ea typeface="맑은 고딕" panose="020B0503020000020004" pitchFamily="50" charset="-127"/>
               </a:rPr>
-              <a:t>52</a:t>
+              <a:t>53</a:t>
             </a:fld>
             <a:endParaRPr lang="ko-KR" altLang="en-US">
               <a:latin typeface="맑은 고딕" panose="020B0503020000020004" pitchFamily="50" charset="-127"/>
@@ -7276,7 +7396,7 @@
           <a:p>
             <a:fld id="{990475B5-67CA-4281-BDCA-DA943C3C8EB3}" type="datetime1">
               <a:rPr lang="ko-KR" altLang="en-US" noProof="0" smtClean="0"/>
-              <a:t>2026-04-16</a:t>
+              <a:t>2026-05-27</a:t>
             </a:fld>
             <a:endParaRPr lang="ko-KR" altLang="en-US" noProof="0"/>
           </a:p>
@@ -7870,7 +7990,7 @@
           <a:p>
             <a:fld id="{48A87A34-81AB-432B-8DAE-1953F412C126}" type="datetimeFigureOut">
               <a:rPr lang="en-US" smtClean="0"/>
-              <a:t>4/16/2026</a:t>
+              <a:t>5/27/2026</a:t>
             </a:fld>
             <a:endParaRPr lang="en-US" dirty="0"/>
           </a:p>
@@ -8139,7 +8259,7 @@
           <a:p>
             <a:fld id="{28A3BAFB-7A40-4072-A7FD-FB0EDC55F13F}" type="datetime1">
               <a:rPr lang="ko-KR" altLang="en-US" smtClean="0"/>
-              <a:t>2026-04-16</a:t>
+              <a:t>2026-05-27</a:t>
             </a:fld>
             <a:endParaRPr lang="en-US" dirty="0"/>
           </a:p>
@@ -8444,7 +8564,7 @@
           <a:p>
             <a:fld id="{C655C81E-72E7-4D05-94B5-F45B321A525D}" type="datetime1">
               <a:rPr lang="ko-KR" altLang="en-US" noProof="0" smtClean="0"/>
-              <a:t>2026-04-16</a:t>
+              <a:t>2026-05-27</a:t>
             </a:fld>
             <a:endParaRPr lang="ko-KR" altLang="en-US" noProof="0" dirty="0">
               <a:latin typeface="맑은 고딕" panose="020B0503020000020004" pitchFamily="50" charset="-127"/>
@@ -10956,10 +11076,10 @@
           <p:nvPr/>
         </p:nvPicPr>
         <p:blipFill>
-          <a:blip r:embed="rId4">
+          <a:blip>
             <a:extLst>
               <a:ext uri="{96DAC541-7B7A-43D3-8B79-37D633B846F1}">
-                <asvg:svgBlip xmlns:asvg="http://schemas.microsoft.com/office/drawing/2016/SVG/main" r:embed="rId5"/>
+                <asvg:svgBlip xmlns:asvg="http://schemas.microsoft.com/office/drawing/2016/SVG/main" r:embed="rId4"/>
               </a:ext>
             </a:extLst>
           </a:blip>
@@ -16948,8 +17068,8 @@
           </p:spPr>
         </p:pic>
       </p:grpSp>
-      <mc:AlternateContent xmlns:mc="http://schemas.openxmlformats.org/markup-compatibility/2006">
-        <mc:Choice xmlns:a14="http://schemas.microsoft.com/office/drawing/2010/main" Requires="a14">
+      <mc:AlternateContent xmlns:mc="http://schemas.openxmlformats.org/markup-compatibility/2006" xmlns:a14="http://schemas.microsoft.com/office/drawing/2010/main">
+        <mc:Choice Requires="a14">
           <p:sp>
             <p:nvSpPr>
               <p:cNvPr id="13" name="TextBox 12">
@@ -16996,7 +17116,7 @@
                     <m:func>
                       <m:funcPr>
                         <m:ctrlPr>
-                          <a:rPr lang="ko-KR" altLang="en-US" smtClean="0">
+                          <a:rPr lang="ko-KR" altLang="en-US" i="1" smtClean="0">
                             <a:latin typeface="Cambria Math" panose="02040503050406030204" pitchFamily="18" charset="0"/>
                           </a:rPr>
                         </m:ctrlPr>
@@ -17190,7 +17310,7 @@
             </p:txBody>
           </p:sp>
         </mc:Choice>
-        <mc:Fallback>
+        <mc:Fallback xmlns="">
           <p:sp>
             <p:nvSpPr>
               <p:cNvPr id="13" name="TextBox 12">
@@ -17279,12 +17399,870 @@
           <a:chExt cx="0" cy="0"/>
         </a:xfrm>
       </p:grpSpPr>
+      <p:pic>
+        <p:nvPicPr>
+          <p:cNvPr id="25" name="그림 24">
+            <a:extLst>
+              <a:ext uri="{FF2B5EF4-FFF2-40B4-BE49-F238E27FC236}">
+                <a16:creationId xmlns:a16="http://schemas.microsoft.com/office/drawing/2014/main" id="{77EEE691-56DC-C318-EA9F-C3DF524E1859}"/>
+              </a:ext>
+            </a:extLst>
+          </p:cNvPr>
+          <p:cNvPicPr>
+            <a:picLocks noChangeAspect="1"/>
+          </p:cNvPicPr>
+          <p:nvPr/>
+        </p:nvPicPr>
+        <p:blipFill>
+          <a:blip r:embed="rId3"/>
+          <a:stretch>
+            <a:fillRect/>
+          </a:stretch>
+        </p:blipFill>
+        <p:spPr>
+          <a:xfrm>
+            <a:off x="2552456" y="2397971"/>
+            <a:ext cx="6058182" cy="3858529"/>
+          </a:xfrm>
+          <a:prstGeom prst="rect">
+            <a:avLst/>
+          </a:prstGeom>
+        </p:spPr>
+      </p:pic>
+      <mc:AlternateContent xmlns:mc="http://schemas.openxmlformats.org/markup-compatibility/2006">
+        <mc:Choice xmlns:a14="http://schemas.microsoft.com/office/drawing/2010/main" Requires="a14">
+          <p:sp>
+            <p:nvSpPr>
+              <p:cNvPr id="8" name="제목 7">
+                <a:extLst>
+                  <a:ext uri="{FF2B5EF4-FFF2-40B4-BE49-F238E27FC236}">
+                    <a16:creationId xmlns:a16="http://schemas.microsoft.com/office/drawing/2014/main" id="{4B239653-EF5D-516E-54F8-717E088DA1E8}"/>
+                  </a:ext>
+                </a:extLst>
+              </p:cNvPr>
+              <p:cNvSpPr>
+                <a:spLocks noGrp="1"/>
+              </p:cNvSpPr>
+              <p:nvPr>
+                <p:ph type="title"/>
+              </p:nvPr>
+            </p:nvSpPr>
+            <p:spPr>
+              <a:xfrm>
+                <a:off x="521207" y="448056"/>
+                <a:ext cx="8135613" cy="640080"/>
+              </a:xfrm>
+            </p:spPr>
+            <p:txBody>
+              <a:bodyPr rtlCol="0">
+                <a:noAutofit/>
+              </a:bodyPr>
+              <a:lstStyle/>
+              <a:p>
+                <a:r>
+                  <a:rPr lang="en-US" altLang="ko-KR" dirty="0"/>
+                  <a:t>Projection </a:t>
+                </a:r>
+                <a14:m>
+                  <m:oMath xmlns:m="http://schemas.openxmlformats.org/officeDocument/2006/math">
+                    <m:r>
+                      <a:rPr lang="en-US" altLang="ko-KR" i="1" dirty="0">
+                        <a:latin typeface="Cambria Math" panose="02040503050406030204" pitchFamily="18" charset="0"/>
+                      </a:rPr>
+                      <m:t>≈</m:t>
+                    </m:r>
+                  </m:oMath>
+                </a14:m>
+                <a:r>
+                  <a:rPr lang="en-US" altLang="ko-KR" dirty="0"/>
+                  <a:t> Landing </a:t>
+                </a:r>
+                <a14:m>
+                  <m:oMath xmlns:m="http://schemas.openxmlformats.org/officeDocument/2006/math">
+                    <m:r>
+                      <a:rPr lang="en-US" altLang="ko-KR" i="1" dirty="0" smtClean="0">
+                        <a:latin typeface="Cambria Math" panose="02040503050406030204" pitchFamily="18" charset="0"/>
+                      </a:rPr>
+                      <m:t>≈</m:t>
+                    </m:r>
+                  </m:oMath>
+                </a14:m>
+                <a:r>
+                  <a:rPr lang="en-US" altLang="ko-KR" dirty="0"/>
+                  <a:t> Dot product</a:t>
+                </a:r>
+                <a:endParaRPr lang="ko-KR" altLang="en-US" dirty="0">
+                  <a:cs typeface="Segoe UI Light" panose="020B0502040204020203" pitchFamily="34" charset="0"/>
+                </a:endParaRPr>
+              </a:p>
+            </p:txBody>
+          </p:sp>
+        </mc:Choice>
+        <mc:Fallback>
+          <p:sp>
+            <p:nvSpPr>
+              <p:cNvPr id="8" name="제목 7">
+                <a:extLst>
+                  <a:ext uri="{FF2B5EF4-FFF2-40B4-BE49-F238E27FC236}">
+                    <a16:creationId xmlns:a16="http://schemas.microsoft.com/office/drawing/2014/main" id="{4B239653-EF5D-516E-54F8-717E088DA1E8}"/>
+                  </a:ext>
+                </a:extLst>
+              </p:cNvPr>
+              <p:cNvSpPr>
+                <a:spLocks noGrp="1" noRot="1" noChangeAspect="1" noMove="1" noResize="1" noEditPoints="1" noAdjustHandles="1" noChangeArrowheads="1" noChangeShapeType="1" noTextEdit="1"/>
+              </p:cNvSpPr>
+              <p:nvPr>
+                <p:ph type="title"/>
+              </p:nvPr>
+            </p:nvSpPr>
+            <p:spPr>
+              <a:xfrm>
+                <a:off x="521207" y="448056"/>
+                <a:ext cx="8135613" cy="640080"/>
+              </a:xfrm>
+              <a:blipFill>
+                <a:blip r:embed="rId4"/>
+                <a:stretch>
+                  <a:fillRect l="-1498" b="-25714"/>
+                </a:stretch>
+              </a:blipFill>
+            </p:spPr>
+            <p:txBody>
+              <a:bodyPr/>
+              <a:lstStyle/>
+              <a:p>
+                <a:r>
+                  <a:rPr lang="ko-KR" altLang="en-US">
+                    <a:noFill/>
+                  </a:rPr>
+                  <a:t> </a:t>
+                </a:r>
+              </a:p>
+            </p:txBody>
+          </p:sp>
+        </mc:Fallback>
+      </mc:AlternateContent>
+      <p:sp>
+        <p:nvSpPr>
+          <p:cNvPr id="12" name="슬라이드 번호 개체 틀 11">
+            <a:extLst>
+              <a:ext uri="{FF2B5EF4-FFF2-40B4-BE49-F238E27FC236}">
+                <a16:creationId xmlns:a16="http://schemas.microsoft.com/office/drawing/2014/main" id="{6A646686-0FD5-B0C0-2511-5E496D7C3AC7}"/>
+              </a:ext>
+            </a:extLst>
+          </p:cNvPr>
+          <p:cNvSpPr>
+            <a:spLocks noGrp="1"/>
+          </p:cNvSpPr>
+          <p:nvPr>
+            <p:ph type="sldNum" sz="quarter" idx="4"/>
+          </p:nvPr>
+        </p:nvSpPr>
+        <p:spPr/>
+        <p:txBody>
+          <a:bodyPr/>
+          <a:lstStyle/>
+          <a:p>
+            <a:fld id="{9860EDB8-5305-433F-BE41-D7A86D811DB3}" type="slidenum">
+              <a:rPr lang="en-US" altLang="ko-KR" noProof="0" smtClean="0"/>
+              <a:pPr/>
+              <a:t>32</a:t>
+            </a:fld>
+            <a:endParaRPr lang="ko-KR" altLang="en-US" noProof="0"/>
+          </a:p>
+        </p:txBody>
+      </p:sp>
+      <p:pic>
+        <p:nvPicPr>
+          <p:cNvPr id="3" name="그림 2">
+            <a:extLst>
+              <a:ext uri="{FF2B5EF4-FFF2-40B4-BE49-F238E27FC236}">
+                <a16:creationId xmlns:a16="http://schemas.microsoft.com/office/drawing/2014/main" id="{E82B1382-DCA7-C796-9564-95A0BF4E3A80}"/>
+              </a:ext>
+            </a:extLst>
+          </p:cNvPr>
+          <p:cNvPicPr>
+            <a:picLocks noChangeAspect="1"/>
+          </p:cNvPicPr>
+          <p:nvPr/>
+        </p:nvPicPr>
+        <p:blipFill>
+          <a:blip r:embed="rId5"/>
+          <a:stretch>
+            <a:fillRect/>
+          </a:stretch>
+        </p:blipFill>
+        <p:spPr>
+          <a:xfrm>
+            <a:off x="6690972" y="3251863"/>
+            <a:ext cx="774156" cy="614537"/>
+          </a:xfrm>
+          <a:prstGeom prst="rect">
+            <a:avLst/>
+          </a:prstGeom>
+          <a:ln w="19050">
+            <a:solidFill>
+              <a:schemeClr val="tx1"/>
+            </a:solidFill>
+          </a:ln>
+        </p:spPr>
+      </p:pic>
+      <p:pic>
+        <p:nvPicPr>
+          <p:cNvPr id="5" name="그림 4">
+            <a:extLst>
+              <a:ext uri="{FF2B5EF4-FFF2-40B4-BE49-F238E27FC236}">
+                <a16:creationId xmlns:a16="http://schemas.microsoft.com/office/drawing/2014/main" id="{A9832CC7-1F1B-4F03-7B10-FD0DB1383E6E}"/>
+              </a:ext>
+            </a:extLst>
+          </p:cNvPr>
+          <p:cNvPicPr>
+            <a:picLocks noChangeAspect="1"/>
+          </p:cNvPicPr>
+          <p:nvPr/>
+        </p:nvPicPr>
+        <p:blipFill>
+          <a:blip r:embed="rId6"/>
+          <a:stretch>
+            <a:fillRect/>
+          </a:stretch>
+        </p:blipFill>
+        <p:spPr>
+          <a:xfrm>
+            <a:off x="6755802" y="5121310"/>
+            <a:ext cx="2785362" cy="582611"/>
+          </a:xfrm>
+          <a:prstGeom prst="rect">
+            <a:avLst/>
+          </a:prstGeom>
+          <a:ln w="28575">
+            <a:solidFill>
+              <a:srgbClr val="FF0000"/>
+            </a:solidFill>
+          </a:ln>
+        </p:spPr>
+      </p:pic>
+      <p:pic>
+        <p:nvPicPr>
+          <p:cNvPr id="7" name="그림 6">
+            <a:extLst>
+              <a:ext uri="{FF2B5EF4-FFF2-40B4-BE49-F238E27FC236}">
+                <a16:creationId xmlns:a16="http://schemas.microsoft.com/office/drawing/2014/main" id="{DE7449E7-7207-6793-057A-4CB6C50AB8F6}"/>
+              </a:ext>
+            </a:extLst>
+          </p:cNvPr>
+          <p:cNvPicPr>
+            <a:picLocks noChangeAspect="1"/>
+          </p:cNvPicPr>
+          <p:nvPr/>
+        </p:nvPicPr>
+        <p:blipFill>
+          <a:blip r:embed="rId7"/>
+          <a:stretch>
+            <a:fillRect/>
+          </a:stretch>
+        </p:blipFill>
+        <p:spPr>
+          <a:xfrm>
+            <a:off x="875489" y="2470064"/>
+            <a:ext cx="2764427" cy="602306"/>
+          </a:xfrm>
+          <a:prstGeom prst="rect">
+            <a:avLst/>
+          </a:prstGeom>
+          <a:ln w="28575">
+            <a:solidFill>
+              <a:srgbClr val="00B0F0"/>
+            </a:solidFill>
+          </a:ln>
+        </p:spPr>
+      </p:pic>
+      <mc:AlternateContent xmlns:mc="http://schemas.openxmlformats.org/markup-compatibility/2006">
+        <mc:Choice xmlns:a14="http://schemas.microsoft.com/office/drawing/2010/main" Requires="a14">
+          <p:sp>
+            <p:nvSpPr>
+              <p:cNvPr id="10" name="TextBox 9">
+                <a:extLst>
+                  <a:ext uri="{FF2B5EF4-FFF2-40B4-BE49-F238E27FC236}">
+                    <a16:creationId xmlns:a16="http://schemas.microsoft.com/office/drawing/2014/main" id="{3D4F2EE9-C097-BF00-83B3-68540227E061}"/>
+                  </a:ext>
+                </a:extLst>
+              </p:cNvPr>
+              <p:cNvSpPr txBox="1"/>
+              <p:nvPr/>
+            </p:nvSpPr>
+            <p:spPr>
+              <a:xfrm>
+                <a:off x="521207" y="1323913"/>
+                <a:ext cx="11255157" cy="783356"/>
+              </a:xfrm>
+              <a:prstGeom prst="rect">
+                <a:avLst/>
+              </a:prstGeom>
+              <a:noFill/>
+            </p:spPr>
+            <p:txBody>
+              <a:bodyPr wrap="square">
+                <a:spAutoFit/>
+              </a:bodyPr>
+              <a:lstStyle/>
+              <a:p>
+                <a:pPr>
+                  <a:lnSpc>
+                    <a:spcPct val="150000"/>
+                  </a:lnSpc>
+                </a:pPr>
+                <a:r>
+                  <a:rPr lang="ko-KR" altLang="en-US" sz="1600" dirty="0">
+                    <a:latin typeface="맑은 고딕 Semilight" panose="020B0502040204020203" pitchFamily="50" charset="-127"/>
+                    <a:ea typeface="맑은 고딕 Semilight" panose="020B0502040204020203" pitchFamily="50" charset="-127"/>
+                    <a:cs typeface="맑은 고딕 Semilight" panose="020B0502040204020203" pitchFamily="50" charset="-127"/>
+                  </a:rPr>
+                  <a:t>어떤 벡터 </a:t>
+                </a:r>
+                <a14:m>
+                  <m:oMath xmlns:m="http://schemas.openxmlformats.org/officeDocument/2006/math">
+                    <m:r>
+                      <a:rPr lang="en-US" altLang="ko-KR" sz="1600" i="1" smtClean="0">
+                        <a:latin typeface="Cambria Math" panose="02040503050406030204" pitchFamily="18" charset="0"/>
+                      </a:rPr>
+                      <m:t>𝑣</m:t>
+                    </m:r>
+                  </m:oMath>
+                </a14:m>
+                <a:r>
+                  <a:rPr lang="en-US" altLang="ko-KR" sz="1600" dirty="0">
+                    <a:latin typeface="맑은 고딕 Semilight" panose="020B0502040204020203" pitchFamily="50" charset="-127"/>
+                    <a:ea typeface="맑은 고딕 Semilight" panose="020B0502040204020203" pitchFamily="50" charset="-127"/>
+                    <a:cs typeface="맑은 고딕 Semilight" panose="020B0502040204020203" pitchFamily="50" charset="-127"/>
+                  </a:rPr>
+                  <a:t> = (3,4)</a:t>
+                </a:r>
+                <a:r>
+                  <a:rPr lang="ko-KR" altLang="en-US" sz="1600" dirty="0">
+                    <a:latin typeface="맑은 고딕 Semilight" panose="020B0502040204020203" pitchFamily="50" charset="-127"/>
+                    <a:ea typeface="맑은 고딕 Semilight" panose="020B0502040204020203" pitchFamily="50" charset="-127"/>
+                    <a:cs typeface="맑은 고딕 Semilight" panose="020B0502040204020203" pitchFamily="50" charset="-127"/>
+                  </a:rPr>
+                  <a:t>를 특정 축에 투영한다는 것은</a:t>
+                </a:r>
+                <a:r>
+                  <a:rPr lang="en-US" altLang="ko-KR" sz="1600" dirty="0">
+                    <a:latin typeface="맑은 고딕 Semilight" panose="020B0502040204020203" pitchFamily="50" charset="-127"/>
+                    <a:ea typeface="맑은 고딕 Semilight" panose="020B0502040204020203" pitchFamily="50" charset="-127"/>
+                    <a:cs typeface="맑은 고딕 Semilight" panose="020B0502040204020203" pitchFamily="50" charset="-127"/>
+                  </a:rPr>
+                  <a:t>, </a:t>
+                </a:r>
+                <a:r>
+                  <a:rPr lang="ko-KR" altLang="en-US" sz="1600" dirty="0">
+                    <a:latin typeface="맑은 고딕 Semilight" panose="020B0502040204020203" pitchFamily="50" charset="-127"/>
+                    <a:ea typeface="맑은 고딕 Semilight" panose="020B0502040204020203" pitchFamily="50" charset="-127"/>
+                    <a:cs typeface="맑은 고딕 Semilight" panose="020B0502040204020203" pitchFamily="50" charset="-127"/>
+                  </a:rPr>
+                  <a:t>해당 축 방향의 정보만 남기고 나머지 직교하는 방향의 정보는 </a:t>
+                </a:r>
+                <a:r>
+                  <a:rPr lang="en-US" altLang="ko-KR" sz="1600" dirty="0">
+                    <a:latin typeface="맑은 고딕 Semilight" panose="020B0502040204020203" pitchFamily="50" charset="-127"/>
+                    <a:ea typeface="맑은 고딕 Semilight" panose="020B0502040204020203" pitchFamily="50" charset="-127"/>
+                    <a:cs typeface="맑은 고딕 Semilight" panose="020B0502040204020203" pitchFamily="50" charset="-127"/>
+                  </a:rPr>
+                  <a:t>0</a:t>
+                </a:r>
+                <a:r>
+                  <a:rPr lang="ko-KR" altLang="en-US" sz="1600" dirty="0">
+                    <a:latin typeface="맑은 고딕 Semilight" panose="020B0502040204020203" pitchFamily="50" charset="-127"/>
+                    <a:ea typeface="맑은 고딕 Semilight" panose="020B0502040204020203" pitchFamily="50" charset="-127"/>
+                    <a:cs typeface="맑은 고딕 Semilight" panose="020B0502040204020203" pitchFamily="50" charset="-127"/>
+                  </a:rPr>
+                  <a:t>으로 만드는 것으로 투영 행렬</a:t>
+                </a:r>
+                <a:r>
+                  <a:rPr lang="en-US" altLang="ko-KR" sz="1600" dirty="0">
+                    <a:latin typeface="맑은 고딕 Semilight" panose="020B0502040204020203" pitchFamily="50" charset="-127"/>
+                    <a:ea typeface="맑은 고딕 Semilight" panose="020B0502040204020203" pitchFamily="50" charset="-127"/>
+                    <a:cs typeface="맑은 고딕 Semilight" panose="020B0502040204020203" pitchFamily="50" charset="-127"/>
+                  </a:rPr>
+                  <a:t>(Projection Matrix)</a:t>
+                </a:r>
+                <a:r>
+                  <a:rPr lang="ko-KR" altLang="en-US" sz="1600" dirty="0">
+                    <a:latin typeface="맑은 고딕 Semilight" panose="020B0502040204020203" pitchFamily="50" charset="-127"/>
+                    <a:ea typeface="맑은 고딕 Semilight" panose="020B0502040204020203" pitchFamily="50" charset="-127"/>
+                    <a:cs typeface="맑은 고딕 Semilight" panose="020B0502040204020203" pitchFamily="50" charset="-127"/>
+                  </a:rPr>
+                  <a:t>과의 내적</a:t>
+                </a:r>
+                <a:r>
+                  <a:rPr lang="en-US" altLang="ko-KR" sz="1600" dirty="0">
+                    <a:latin typeface="맑은 고딕 Semilight" panose="020B0502040204020203" pitchFamily="50" charset="-127"/>
+                    <a:ea typeface="맑은 고딕 Semilight" panose="020B0502040204020203" pitchFamily="50" charset="-127"/>
+                    <a:cs typeface="맑은 고딕 Semilight" panose="020B0502040204020203" pitchFamily="50" charset="-127"/>
+                  </a:rPr>
+                  <a:t>(</a:t>
+                </a:r>
+                <a:r>
+                  <a:rPr lang="ko-KR" altLang="en-US" sz="1600" dirty="0">
+                    <a:latin typeface="맑은 고딕 Semilight" panose="020B0502040204020203" pitchFamily="50" charset="-127"/>
+                    <a:ea typeface="맑은 고딕 Semilight" panose="020B0502040204020203" pitchFamily="50" charset="-127"/>
+                    <a:cs typeface="맑은 고딕 Semilight" panose="020B0502040204020203" pitchFamily="50" charset="-127"/>
+                  </a:rPr>
+                  <a:t>행렬 곱</a:t>
+                </a:r>
+                <a:r>
+                  <a:rPr lang="en-US" altLang="ko-KR" sz="1600" dirty="0">
+                    <a:latin typeface="맑은 고딕 Semilight" panose="020B0502040204020203" pitchFamily="50" charset="-127"/>
+                    <a:ea typeface="맑은 고딕 Semilight" panose="020B0502040204020203" pitchFamily="50" charset="-127"/>
+                    <a:cs typeface="맑은 고딕 Semilight" panose="020B0502040204020203" pitchFamily="50" charset="-127"/>
+                  </a:rPr>
+                  <a:t>)</a:t>
+                </a:r>
+                <a:r>
+                  <a:rPr lang="ko-KR" altLang="en-US" sz="1600" dirty="0">
+                    <a:latin typeface="맑은 고딕 Semilight" panose="020B0502040204020203" pitchFamily="50" charset="-127"/>
+                    <a:ea typeface="맑은 고딕 Semilight" panose="020B0502040204020203" pitchFamily="50" charset="-127"/>
+                    <a:cs typeface="맑은 고딕 Semilight" panose="020B0502040204020203" pitchFamily="50" charset="-127"/>
+                  </a:rPr>
+                  <a:t>으로 표현할 수 있음</a:t>
+                </a:r>
+              </a:p>
+            </p:txBody>
+          </p:sp>
+        </mc:Choice>
+        <mc:Fallback>
+          <p:sp>
+            <p:nvSpPr>
+              <p:cNvPr id="10" name="TextBox 9">
+                <a:extLst>
+                  <a:ext uri="{FF2B5EF4-FFF2-40B4-BE49-F238E27FC236}">
+                    <a16:creationId xmlns:a16="http://schemas.microsoft.com/office/drawing/2014/main" id="{3D4F2EE9-C097-BF00-83B3-68540227E061}"/>
+                  </a:ext>
+                </a:extLst>
+              </p:cNvPr>
+              <p:cNvSpPr txBox="1">
+                <a:spLocks noRot="1" noChangeAspect="1" noMove="1" noResize="1" noEditPoints="1" noAdjustHandles="1" noChangeArrowheads="1" noChangeShapeType="1" noTextEdit="1"/>
+              </p:cNvSpPr>
+              <p:nvPr/>
+            </p:nvSpPr>
+            <p:spPr>
+              <a:xfrm>
+                <a:off x="521207" y="1323913"/>
+                <a:ext cx="11255157" cy="783356"/>
+              </a:xfrm>
+              <a:prstGeom prst="rect">
+                <a:avLst/>
+              </a:prstGeom>
+              <a:blipFill>
+                <a:blip r:embed="rId8"/>
+                <a:stretch>
+                  <a:fillRect l="-271" b="-8527"/>
+                </a:stretch>
+              </a:blipFill>
+            </p:spPr>
+            <p:txBody>
+              <a:bodyPr/>
+              <a:lstStyle/>
+              <a:p>
+                <a:r>
+                  <a:rPr lang="ko-KR" altLang="en-US">
+                    <a:noFill/>
+                  </a:rPr>
+                  <a:t> </a:t>
+                </a:r>
+              </a:p>
+            </p:txBody>
+          </p:sp>
+        </mc:Fallback>
+      </mc:AlternateContent>
+      <p:sp>
+        <p:nvSpPr>
+          <p:cNvPr id="27" name="TextBox 26">
+            <a:extLst>
+              <a:ext uri="{FF2B5EF4-FFF2-40B4-BE49-F238E27FC236}">
+                <a16:creationId xmlns:a16="http://schemas.microsoft.com/office/drawing/2014/main" id="{681C5761-F3E1-4C0F-CE37-6257B9F0EDA8}"/>
+              </a:ext>
+            </a:extLst>
+          </p:cNvPr>
+          <p:cNvSpPr txBox="1"/>
+          <p:nvPr/>
+        </p:nvSpPr>
+        <p:spPr>
+          <a:xfrm>
+            <a:off x="6755803" y="4784450"/>
+            <a:ext cx="1616124" cy="276999"/>
+          </a:xfrm>
+          <a:prstGeom prst="rect">
+            <a:avLst/>
+          </a:prstGeom>
+          <a:noFill/>
+        </p:spPr>
+        <p:txBody>
+          <a:bodyPr wrap="square">
+            <a:spAutoFit/>
+          </a:bodyPr>
+          <a:lstStyle/>
+          <a:p>
+            <a:r>
+              <a:rPr lang="en-US" altLang="ko-KR" sz="1200" b="1" dirty="0">
+                <a:solidFill>
+                  <a:srgbClr val="C00000"/>
+                </a:solidFill>
+                <a:latin typeface="맑은 고딕 Semilight" panose="020B0502040204020203" pitchFamily="50" charset="-127"/>
+                <a:ea typeface="맑은 고딕 Semilight" panose="020B0502040204020203" pitchFamily="50" charset="-127"/>
+                <a:cs typeface="맑은 고딕 Semilight" panose="020B0502040204020203" pitchFamily="50" charset="-127"/>
+              </a:rPr>
+              <a:t>X </a:t>
+            </a:r>
+            <a:r>
+              <a:rPr lang="ko-KR" altLang="en-US" sz="1200" b="1" dirty="0">
+                <a:solidFill>
+                  <a:srgbClr val="C00000"/>
+                </a:solidFill>
+                <a:latin typeface="맑은 고딕 Semilight" panose="020B0502040204020203" pitchFamily="50" charset="-127"/>
+                <a:ea typeface="맑은 고딕 Semilight" panose="020B0502040204020203" pitchFamily="50" charset="-127"/>
+                <a:cs typeface="맑은 고딕 Semilight" panose="020B0502040204020203" pitchFamily="50" charset="-127"/>
+              </a:rPr>
+              <a:t>축으로 </a:t>
+            </a:r>
+            <a:r>
+              <a:rPr lang="en-US" altLang="ko-KR" sz="1200" b="1" dirty="0">
+                <a:solidFill>
+                  <a:srgbClr val="C00000"/>
+                </a:solidFill>
+                <a:latin typeface="맑은 고딕 Semilight" panose="020B0502040204020203" pitchFamily="50" charset="-127"/>
+                <a:ea typeface="맑은 고딕 Semilight" panose="020B0502040204020203" pitchFamily="50" charset="-127"/>
+                <a:cs typeface="맑은 고딕 Semilight" panose="020B0502040204020203" pitchFamily="50" charset="-127"/>
+              </a:rPr>
+              <a:t>projection</a:t>
+            </a:r>
+            <a:r>
+              <a:rPr lang="ko-KR" altLang="en-US" sz="1200" b="1" dirty="0">
+                <a:solidFill>
+                  <a:srgbClr val="C00000"/>
+                </a:solidFill>
+                <a:latin typeface="맑은 고딕 Semilight" panose="020B0502040204020203" pitchFamily="50" charset="-127"/>
+                <a:ea typeface="맑은 고딕 Semilight" panose="020B0502040204020203" pitchFamily="50" charset="-127"/>
+                <a:cs typeface="맑은 고딕 Semilight" panose="020B0502040204020203" pitchFamily="50" charset="-127"/>
+              </a:rPr>
+              <a:t>  </a:t>
+            </a:r>
+            <a:endParaRPr lang="ko-KR" altLang="en-US" sz="1200" b="1" dirty="0">
+              <a:solidFill>
+                <a:srgbClr val="C00000"/>
+              </a:solidFill>
+            </a:endParaRPr>
+          </a:p>
+        </p:txBody>
+      </p:sp>
+      <p:sp>
+        <p:nvSpPr>
+          <p:cNvPr id="28" name="TextBox 27">
+            <a:extLst>
+              <a:ext uri="{FF2B5EF4-FFF2-40B4-BE49-F238E27FC236}">
+                <a16:creationId xmlns:a16="http://schemas.microsoft.com/office/drawing/2014/main" id="{06C039F9-66A3-3528-D3FA-0F2CBD337228}"/>
+              </a:ext>
+            </a:extLst>
+          </p:cNvPr>
+          <p:cNvSpPr txBox="1"/>
+          <p:nvPr/>
+        </p:nvSpPr>
+        <p:spPr>
+          <a:xfrm>
+            <a:off x="813868" y="3198791"/>
+            <a:ext cx="1616124" cy="276999"/>
+          </a:xfrm>
+          <a:prstGeom prst="rect">
+            <a:avLst/>
+          </a:prstGeom>
+          <a:noFill/>
+        </p:spPr>
+        <p:txBody>
+          <a:bodyPr wrap="square">
+            <a:spAutoFit/>
+          </a:bodyPr>
+          <a:lstStyle/>
+          <a:p>
+            <a:r>
+              <a:rPr lang="en-US" altLang="ko-KR" sz="1200" b="1" dirty="0">
+                <a:solidFill>
+                  <a:srgbClr val="00B0F0"/>
+                </a:solidFill>
+                <a:latin typeface="맑은 고딕 Semilight" panose="020B0502040204020203" pitchFamily="50" charset="-127"/>
+                <a:ea typeface="맑은 고딕 Semilight" panose="020B0502040204020203" pitchFamily="50" charset="-127"/>
+                <a:cs typeface="맑은 고딕 Semilight" panose="020B0502040204020203" pitchFamily="50" charset="-127"/>
+              </a:rPr>
+              <a:t>y </a:t>
+            </a:r>
+            <a:r>
+              <a:rPr lang="ko-KR" altLang="en-US" sz="1200" b="1" dirty="0">
+                <a:solidFill>
+                  <a:srgbClr val="00B0F0"/>
+                </a:solidFill>
+                <a:latin typeface="맑은 고딕 Semilight" panose="020B0502040204020203" pitchFamily="50" charset="-127"/>
+                <a:ea typeface="맑은 고딕 Semilight" panose="020B0502040204020203" pitchFamily="50" charset="-127"/>
+                <a:cs typeface="맑은 고딕 Semilight" panose="020B0502040204020203" pitchFamily="50" charset="-127"/>
+              </a:rPr>
+              <a:t>축으로 </a:t>
+            </a:r>
+            <a:r>
+              <a:rPr lang="en-US" altLang="ko-KR" sz="1200" b="1" dirty="0">
+                <a:solidFill>
+                  <a:srgbClr val="00B0F0"/>
+                </a:solidFill>
+                <a:latin typeface="맑은 고딕 Semilight" panose="020B0502040204020203" pitchFamily="50" charset="-127"/>
+                <a:ea typeface="맑은 고딕 Semilight" panose="020B0502040204020203" pitchFamily="50" charset="-127"/>
+                <a:cs typeface="맑은 고딕 Semilight" panose="020B0502040204020203" pitchFamily="50" charset="-127"/>
+              </a:rPr>
+              <a:t>projection</a:t>
+            </a:r>
+            <a:r>
+              <a:rPr lang="ko-KR" altLang="en-US" sz="1200" b="1" dirty="0">
+                <a:solidFill>
+                  <a:srgbClr val="00B0F0"/>
+                </a:solidFill>
+                <a:latin typeface="맑은 고딕 Semilight" panose="020B0502040204020203" pitchFamily="50" charset="-127"/>
+                <a:ea typeface="맑은 고딕 Semilight" panose="020B0502040204020203" pitchFamily="50" charset="-127"/>
+                <a:cs typeface="맑은 고딕 Semilight" panose="020B0502040204020203" pitchFamily="50" charset="-127"/>
+              </a:rPr>
+              <a:t>  </a:t>
+            </a:r>
+            <a:endParaRPr lang="ko-KR" altLang="en-US" sz="1200" b="1" dirty="0">
+              <a:solidFill>
+                <a:srgbClr val="00B0F0"/>
+              </a:solidFill>
+            </a:endParaRPr>
+          </a:p>
+        </p:txBody>
+      </p:sp>
+    </p:spTree>
+    <p:extLst>
+      <p:ext uri="{BB962C8B-B14F-4D97-AF65-F5344CB8AC3E}">
+        <p14:creationId xmlns:p14="http://schemas.microsoft.com/office/powerpoint/2010/main" val="3226701330"/>
+      </p:ext>
+    </p:extLst>
+  </p:cSld>
+  <p:clrMapOvr>
+    <a:masterClrMapping/>
+  </p:clrMapOvr>
+  <mc:AlternateContent xmlns:mc="http://schemas.openxmlformats.org/markup-compatibility/2006" xmlns:p14="http://schemas.microsoft.com/office/powerpoint/2010/main">
+    <mc:Choice Requires="p14">
+      <p:transition p14:dur="10"/>
+    </mc:Choice>
+    <mc:Fallback xmlns="">
+      <p:transition/>
+    </mc:Fallback>
+  </mc:AlternateContent>
+  <p:timing>
+    <p:tnLst>
+      <p:par>
+        <p:cTn id="1" dur="indefinite" restart="never" nodeType="tmRoot">
+          <p:childTnLst>
+            <p:seq concurrent="1" nextAc="seek">
+              <p:cTn id="2" dur="indefinite" nodeType="mainSeq">
+                <p:childTnLst>
+                  <p:par>
+                    <p:cTn id="3" fill="hold">
+                      <p:stCondLst>
+                        <p:cond delay="indefinite"/>
+                      </p:stCondLst>
+                      <p:childTnLst>
+                        <p:par>
+                          <p:cTn id="4" fill="hold">
+                            <p:stCondLst>
+                              <p:cond delay="0"/>
+                            </p:stCondLst>
+                            <p:childTnLst>
+                              <p:par>
+                                <p:cTn id="5" presetID="1" presetClass="entr" presetSubtype="0" fill="hold" grpId="0" nodeType="clickEffect">
+                                  <p:stCondLst>
+                                    <p:cond delay="0"/>
+                                  </p:stCondLst>
+                                  <p:childTnLst>
+                                    <p:set>
+                                      <p:cBhvr>
+                                        <p:cTn id="6" dur="1" fill="hold">
+                                          <p:stCondLst>
+                                            <p:cond delay="0"/>
+                                          </p:stCondLst>
+                                        </p:cTn>
+                                        <p:tgtEl>
+                                          <p:spTgt spid="27"/>
+                                        </p:tgtEl>
+                                        <p:attrNameLst>
+                                          <p:attrName>style.visibility</p:attrName>
+                                        </p:attrNameLst>
+                                      </p:cBhvr>
+                                      <p:to>
+                                        <p:strVal val="visible"/>
+                                      </p:to>
+                                    </p:set>
+                                  </p:childTnLst>
+                                </p:cTn>
+                              </p:par>
+                              <p:par>
+                                <p:cTn id="7" presetID="1" presetClass="entr" presetSubtype="0" fill="hold" nodeType="withEffect">
+                                  <p:stCondLst>
+                                    <p:cond delay="0"/>
+                                  </p:stCondLst>
+                                  <p:childTnLst>
+                                    <p:set>
+                                      <p:cBhvr>
+                                        <p:cTn id="8" dur="1" fill="hold">
+                                          <p:stCondLst>
+                                            <p:cond delay="0"/>
+                                          </p:stCondLst>
+                                        </p:cTn>
+                                        <p:tgtEl>
+                                          <p:spTgt spid="5"/>
+                                        </p:tgtEl>
+                                        <p:attrNameLst>
+                                          <p:attrName>style.visibility</p:attrName>
+                                        </p:attrNameLst>
+                                      </p:cBhvr>
+                                      <p:to>
+                                        <p:strVal val="visible"/>
+                                      </p:to>
+                                    </p:set>
+                                  </p:childTnLst>
+                                </p:cTn>
+                              </p:par>
+                            </p:childTnLst>
+                          </p:cTn>
+                        </p:par>
+                      </p:childTnLst>
+                    </p:cTn>
+                  </p:par>
+                  <p:par>
+                    <p:cTn id="9" fill="hold">
+                      <p:stCondLst>
+                        <p:cond delay="indefinite"/>
+                      </p:stCondLst>
+                      <p:childTnLst>
+                        <p:par>
+                          <p:cTn id="10" fill="hold">
+                            <p:stCondLst>
+                              <p:cond delay="0"/>
+                            </p:stCondLst>
+                            <p:childTnLst>
+                              <p:par>
+                                <p:cTn id="11" presetID="1" presetClass="entr" presetSubtype="0" fill="hold" grpId="0" nodeType="clickEffect">
+                                  <p:stCondLst>
+                                    <p:cond delay="0"/>
+                                  </p:stCondLst>
+                                  <p:childTnLst>
+                                    <p:set>
+                                      <p:cBhvr>
+                                        <p:cTn id="12" dur="1" fill="hold">
+                                          <p:stCondLst>
+                                            <p:cond delay="0"/>
+                                          </p:stCondLst>
+                                        </p:cTn>
+                                        <p:tgtEl>
+                                          <p:spTgt spid="28"/>
+                                        </p:tgtEl>
+                                        <p:attrNameLst>
+                                          <p:attrName>style.visibility</p:attrName>
+                                        </p:attrNameLst>
+                                      </p:cBhvr>
+                                      <p:to>
+                                        <p:strVal val="visible"/>
+                                      </p:to>
+                                    </p:set>
+                                  </p:childTnLst>
+                                </p:cTn>
+                              </p:par>
+                              <p:par>
+                                <p:cTn id="13" presetID="1" presetClass="entr" presetSubtype="0" fill="hold" nodeType="withEffect">
+                                  <p:stCondLst>
+                                    <p:cond delay="0"/>
+                                  </p:stCondLst>
+                                  <p:childTnLst>
+                                    <p:set>
+                                      <p:cBhvr>
+                                        <p:cTn id="14" dur="1" fill="hold">
+                                          <p:stCondLst>
+                                            <p:cond delay="0"/>
+                                          </p:stCondLst>
+                                        </p:cTn>
+                                        <p:tgtEl>
+                                          <p:spTgt spid="7"/>
+                                        </p:tgtEl>
+                                        <p:attrNameLst>
+                                          <p:attrName>style.visibility</p:attrName>
+                                        </p:attrNameLst>
+                                      </p:cBhvr>
+                                      <p:to>
+                                        <p:strVal val="visible"/>
+                                      </p:to>
+                                    </p:set>
+                                  </p:childTnLst>
+                                </p:cTn>
+                              </p:par>
+                            </p:childTnLst>
+                          </p:cTn>
+                        </p:par>
+                      </p:childTnLst>
+                    </p:cTn>
+                  </p:par>
+                </p:childTnLst>
+              </p:cTn>
+              <p:prevCondLst>
+                <p:cond evt="onPrev" delay="0">
+                  <p:tgtEl>
+                    <p:sldTgt/>
+                  </p:tgtEl>
+                </p:cond>
+              </p:prevCondLst>
+              <p:nextCondLst>
+                <p:cond evt="onNext" delay="0">
+                  <p:tgtEl>
+                    <p:sldTgt/>
+                  </p:tgtEl>
+                </p:cond>
+              </p:nextCondLst>
+            </p:seq>
+          </p:childTnLst>
+        </p:cTn>
+      </p:par>
+    </p:tnLst>
+    <p:bldLst>
+      <p:bldP spid="27" grpId="0"/>
+      <p:bldP spid="28" grpId="0"/>
+    </p:bldLst>
+  </p:timing>
+</p:sld>
+</file>
+
+<file path=ppt/slides/slide33.xml><?xml version="1.0" encoding="utf-8"?>
+<p:sld xmlns:a="http://schemas.openxmlformats.org/drawingml/2006/main" xmlns:r="http://schemas.openxmlformats.org/officeDocument/2006/relationships" xmlns:p="http://schemas.openxmlformats.org/presentationml/2006/main">
+  <p:cSld>
+    <p:spTree>
+      <p:nvGrpSpPr>
+        <p:cNvPr id="1" name="">
+          <a:extLst>
+            <a:ext uri="{FF2B5EF4-FFF2-40B4-BE49-F238E27FC236}">
+              <a16:creationId xmlns:a16="http://schemas.microsoft.com/office/drawing/2014/main" id="{331CF6FB-59BB-FAA6-4E6B-0348F2BB4F00}"/>
+            </a:ext>
+          </a:extLst>
+        </p:cNvPr>
+        <p:cNvGrpSpPr/>
+        <p:nvPr/>
+      </p:nvGrpSpPr>
+      <p:grpSpPr>
+        <a:xfrm>
+          <a:off x="0" y="0"/>
+          <a:ext cx="0" cy="0"/>
+          <a:chOff x="0" y="0"/>
+          <a:chExt cx="0" cy="0"/>
+        </a:xfrm>
+      </p:grpSpPr>
       <p:sp>
         <p:nvSpPr>
           <p:cNvPr id="8" name="제목 7">
             <a:extLst>
               <a:ext uri="{FF2B5EF4-FFF2-40B4-BE49-F238E27FC236}">
-                <a16:creationId xmlns:a16="http://schemas.microsoft.com/office/drawing/2014/main" id="{4B239653-EF5D-516E-54F8-717E088DA1E8}"/>
+                <a16:creationId xmlns:a16="http://schemas.microsoft.com/office/drawing/2014/main" id="{0FB09793-65CD-9863-D894-FB2289EDE324}"/>
               </a:ext>
             </a:extLst>
           </p:cNvPr>
@@ -17322,7 +18300,7 @@
           <p:cNvPr id="12" name="슬라이드 번호 개체 틀 11">
             <a:extLst>
               <a:ext uri="{FF2B5EF4-FFF2-40B4-BE49-F238E27FC236}">
-                <a16:creationId xmlns:a16="http://schemas.microsoft.com/office/drawing/2014/main" id="{6A646686-0FD5-B0C0-2511-5E496D7C3AC7}"/>
+                <a16:creationId xmlns:a16="http://schemas.microsoft.com/office/drawing/2014/main" id="{D88558A7-3054-F618-1888-AF9037585065}"/>
               </a:ext>
             </a:extLst>
           </p:cNvPr>
@@ -17341,7 +18319,7 @@
             <a:fld id="{9860EDB8-5305-433F-BE41-D7A86D811DB3}" type="slidenum">
               <a:rPr lang="en-US" altLang="ko-KR" noProof="0" smtClean="0"/>
               <a:pPr/>
-              <a:t>32</a:t>
+              <a:t>33</a:t>
             </a:fld>
             <a:endParaRPr lang="ko-KR" altLang="en-US" noProof="0"/>
           </a:p>
@@ -17352,7 +18330,7 @@
           <p:cNvPr id="2052" name="Picture 4">
             <a:extLst>
               <a:ext uri="{FF2B5EF4-FFF2-40B4-BE49-F238E27FC236}">
-                <a16:creationId xmlns:a16="http://schemas.microsoft.com/office/drawing/2014/main" id="{CD87AA43-1FD1-2E4C-AAD4-8C8E385EE5F8}"/>
+                <a16:creationId xmlns:a16="http://schemas.microsoft.com/office/drawing/2014/main" id="{735F2F7E-A0D9-EB39-A4C9-791F866C07DA}"/>
               </a:ext>
             </a:extLst>
           </p:cNvPr>
@@ -17397,7 +18375,7 @@
     </p:spTree>
     <p:extLst>
       <p:ext uri="{BB962C8B-B14F-4D97-AF65-F5344CB8AC3E}">
-        <p14:creationId xmlns:p14="http://schemas.microsoft.com/office/powerpoint/2010/main" val="3226701330"/>
+        <p14:creationId xmlns:p14="http://schemas.microsoft.com/office/powerpoint/2010/main" val="3866670120"/>
       </p:ext>
     </p:extLst>
   </p:cSld>
@@ -17415,7 +18393,7 @@
 </p:sld>
 </file>
 
-<file path=ppt/slides/slide33.xml><?xml version="1.0" encoding="utf-8"?>
+<file path=ppt/slides/slide34.xml><?xml version="1.0" encoding="utf-8"?>
 <p:sld xmlns:a="http://schemas.openxmlformats.org/drawingml/2006/main" xmlns:r="http://schemas.openxmlformats.org/officeDocument/2006/relationships" xmlns:p="http://schemas.openxmlformats.org/presentationml/2006/main">
   <p:cSld>
     <p:spTree>
@@ -17500,7 +18478,7 @@
             <a:fld id="{9860EDB8-5305-433F-BE41-D7A86D811DB3}" type="slidenum">
               <a:rPr lang="en-US" altLang="ko-KR" noProof="0" smtClean="0"/>
               <a:pPr/>
-              <a:t>33</a:t>
+              <a:t>34</a:t>
             </a:fld>
             <a:endParaRPr lang="ko-KR" altLang="en-US" noProof="0"/>
           </a:p>
@@ -18407,7 +19385,7 @@
 </p:sld>
 </file>
 
-<file path=ppt/slides/slide34.xml><?xml version="1.0" encoding="utf-8"?>
+<file path=ppt/slides/slide35.xml><?xml version="1.0" encoding="utf-8"?>
 <p:sld xmlns:a="http://schemas.openxmlformats.org/drawingml/2006/main" xmlns:r="http://schemas.openxmlformats.org/officeDocument/2006/relationships" xmlns:p="http://schemas.openxmlformats.org/presentationml/2006/main">
   <p:cSld>
     <p:spTree>
@@ -18492,7 +19470,7 @@
             <a:fld id="{9860EDB8-5305-433F-BE41-D7A86D811DB3}" type="slidenum">
               <a:rPr lang="en-US" altLang="ko-KR" noProof="0" smtClean="0"/>
               <a:pPr/>
-              <a:t>34</a:t>
+              <a:t>35</a:t>
             </a:fld>
             <a:endParaRPr lang="ko-KR" altLang="en-US" noProof="0"/>
           </a:p>
@@ -18549,7 +19527,7 @@
 </p:sld>
 </file>
 
-<file path=ppt/slides/slide35.xml><?xml version="1.0" encoding="utf-8"?>
+<file path=ppt/slides/slide36.xml><?xml version="1.0" encoding="utf-8"?>
 <p:sld xmlns:a="http://schemas.openxmlformats.org/drawingml/2006/main" xmlns:r="http://schemas.openxmlformats.org/officeDocument/2006/relationships" xmlns:p="http://schemas.openxmlformats.org/presentationml/2006/main">
   <p:cSld>
     <p:spTree>
@@ -18634,7 +19612,7 @@
             <a:fld id="{9860EDB8-5305-433F-BE41-D7A86D811DB3}" type="slidenum">
               <a:rPr lang="en-US" altLang="ko-KR" noProof="0" smtClean="0"/>
               <a:pPr/>
-              <a:t>35</a:t>
+              <a:t>36</a:t>
             </a:fld>
             <a:endParaRPr lang="ko-KR" altLang="en-US" noProof="0"/>
           </a:p>
@@ -18750,7 +19728,7 @@
 </p:sld>
 </file>
 
-<file path=ppt/slides/slide36.xml><?xml version="1.0" encoding="utf-8"?>
+<file path=ppt/slides/slide37.xml><?xml version="1.0" encoding="utf-8"?>
 <p:sld xmlns:a="http://schemas.openxmlformats.org/drawingml/2006/main" xmlns:r="http://schemas.openxmlformats.org/officeDocument/2006/relationships" xmlns:p="http://schemas.openxmlformats.org/presentationml/2006/main">
   <p:cSld>
     <p:spTree>
@@ -18835,7 +19813,7 @@
             <a:fld id="{9860EDB8-5305-433F-BE41-D7A86D811DB3}" type="slidenum">
               <a:rPr lang="en-US" altLang="ko-KR" noProof="0" smtClean="0"/>
               <a:pPr/>
-              <a:t>36</a:t>
+              <a:t>37</a:t>
             </a:fld>
             <a:endParaRPr lang="ko-KR" altLang="en-US" noProof="0"/>
           </a:p>
@@ -18986,7 +19964,7 @@
 </p:sld>
 </file>
 
-<file path=ppt/slides/slide37.xml><?xml version="1.0" encoding="utf-8"?>
+<file path=ppt/slides/slide38.xml><?xml version="1.0" encoding="utf-8"?>
 <p:sld xmlns:a="http://schemas.openxmlformats.org/drawingml/2006/main" xmlns:r="http://schemas.openxmlformats.org/officeDocument/2006/relationships" xmlns:p="http://schemas.openxmlformats.org/presentationml/2006/main">
   <p:cSld>
     <p:spTree>
@@ -19128,7 +20106,7 @@
             <a:fld id="{9860EDB8-5305-433F-BE41-D7A86D811DB3}" type="slidenum">
               <a:rPr lang="en-US" altLang="ko-KR" noProof="0" smtClean="0"/>
               <a:pPr/>
-              <a:t>37</a:t>
+              <a:t>38</a:t>
             </a:fld>
             <a:endParaRPr lang="ko-KR" altLang="en-US" noProof="0"/>
           </a:p>
@@ -19337,7 +20315,7 @@
 </p:sld>
 </file>
 
-<file path=ppt/slides/slide38.xml><?xml version="1.0" encoding="utf-8"?>
+<file path=ppt/slides/slide39.xml><?xml version="1.0" encoding="utf-8"?>
 <p:sld xmlns:a="http://schemas.openxmlformats.org/drawingml/2006/main" xmlns:r="http://schemas.openxmlformats.org/officeDocument/2006/relationships" xmlns:p="http://schemas.openxmlformats.org/presentationml/2006/main">
   <p:cSld>
     <p:spTree>
@@ -19422,7 +20400,7 @@
             <a:fld id="{9860EDB8-5305-433F-BE41-D7A86D811DB3}" type="slidenum">
               <a:rPr lang="en-US" altLang="ko-KR" noProof="0" smtClean="0"/>
               <a:pPr/>
-              <a:t>38</a:t>
+              <a:t>39</a:t>
             </a:fld>
             <a:endParaRPr lang="ko-KR" altLang="en-US" noProof="0"/>
           </a:p>
@@ -19479,7 +20457,236 @@
 </p:sld>
 </file>
 
-<file path=ppt/slides/slide39.xml><?xml version="1.0" encoding="utf-8"?>
+<file path=ppt/slides/slide4.xml><?xml version="1.0" encoding="utf-8"?>
+<p:sld xmlns:a="http://schemas.openxmlformats.org/drawingml/2006/main" xmlns:r="http://schemas.openxmlformats.org/officeDocument/2006/relationships" xmlns:p="http://schemas.openxmlformats.org/presentationml/2006/main">
+  <p:cSld>
+    <p:spTree>
+      <p:nvGrpSpPr>
+        <p:cNvPr id="1" name="">
+          <a:extLst>
+            <a:ext uri="{FF2B5EF4-FFF2-40B4-BE49-F238E27FC236}">
+              <a16:creationId xmlns:a16="http://schemas.microsoft.com/office/drawing/2014/main" id="{7D5DC8FC-1345-873F-A6C3-D2B0CCFB6086}"/>
+            </a:ext>
+          </a:extLst>
+        </p:cNvPr>
+        <p:cNvGrpSpPr/>
+        <p:nvPr/>
+      </p:nvGrpSpPr>
+      <p:grpSpPr>
+        <a:xfrm>
+          <a:off x="0" y="0"/>
+          <a:ext cx="0" cy="0"/>
+          <a:chOff x="0" y="0"/>
+          <a:chExt cx="0" cy="0"/>
+        </a:xfrm>
+      </p:grpSpPr>
+      <p:sp>
+        <p:nvSpPr>
+          <p:cNvPr id="8" name="제목 7">
+            <a:extLst>
+              <a:ext uri="{FF2B5EF4-FFF2-40B4-BE49-F238E27FC236}">
+                <a16:creationId xmlns:a16="http://schemas.microsoft.com/office/drawing/2014/main" id="{22FC3679-5A6F-B565-1054-5E0280FB97D2}"/>
+              </a:ext>
+            </a:extLst>
+          </p:cNvPr>
+          <p:cNvSpPr>
+            <a:spLocks noGrp="1"/>
+          </p:cNvSpPr>
+          <p:nvPr>
+            <p:ph type="title"/>
+          </p:nvPr>
+        </p:nvSpPr>
+        <p:spPr>
+          <a:xfrm>
+            <a:off x="521207" y="448056"/>
+            <a:ext cx="8135613" cy="640080"/>
+          </a:xfrm>
+        </p:spPr>
+        <p:txBody>
+          <a:bodyPr rtlCol="0">
+            <a:noAutofit/>
+          </a:bodyPr>
+          <a:lstStyle/>
+          <a:p>
+            <a:pPr rtl="0"/>
+            <a:r>
+              <a:rPr lang="en-US" altLang="ko-KR" dirty="0">
+                <a:cs typeface="Segoe UI Light" panose="020B0502040204020203" pitchFamily="34" charset="0"/>
+              </a:rPr>
+              <a:t>Math for Machine Learning</a:t>
+            </a:r>
+            <a:endParaRPr lang="ko-KR" altLang="en-US" dirty="0">
+              <a:cs typeface="Segoe UI Light" panose="020B0502040204020203" pitchFamily="34" charset="0"/>
+            </a:endParaRPr>
+          </a:p>
+        </p:txBody>
+      </p:sp>
+      <p:sp>
+        <p:nvSpPr>
+          <p:cNvPr id="12" name="슬라이드 번호 개체 틀 11">
+            <a:extLst>
+              <a:ext uri="{FF2B5EF4-FFF2-40B4-BE49-F238E27FC236}">
+                <a16:creationId xmlns:a16="http://schemas.microsoft.com/office/drawing/2014/main" id="{841241FB-BBA8-80A9-657D-4E4C0970905D}"/>
+              </a:ext>
+            </a:extLst>
+          </p:cNvPr>
+          <p:cNvSpPr>
+            <a:spLocks noGrp="1"/>
+          </p:cNvSpPr>
+          <p:nvPr>
+            <p:ph type="sldNum" sz="quarter" idx="4"/>
+          </p:nvPr>
+        </p:nvSpPr>
+        <p:spPr/>
+        <p:txBody>
+          <a:bodyPr/>
+          <a:lstStyle/>
+          <a:p>
+            <a:fld id="{9860EDB8-5305-433F-BE41-D7A86D811DB3}" type="slidenum">
+              <a:rPr lang="en-US" altLang="ko-KR" noProof="0" smtClean="0"/>
+              <a:pPr/>
+              <a:t>4</a:t>
+            </a:fld>
+            <a:endParaRPr lang="ko-KR" altLang="en-US" noProof="0"/>
+          </a:p>
+        </p:txBody>
+      </p:sp>
+      <p:sp>
+        <p:nvSpPr>
+          <p:cNvPr id="5" name="TextBox 4">
+            <a:extLst>
+              <a:ext uri="{FF2B5EF4-FFF2-40B4-BE49-F238E27FC236}">
+                <a16:creationId xmlns:a16="http://schemas.microsoft.com/office/drawing/2014/main" id="{68758DD3-2217-BA8B-05B1-F405206F1A26}"/>
+              </a:ext>
+            </a:extLst>
+          </p:cNvPr>
+          <p:cNvSpPr txBox="1"/>
+          <p:nvPr/>
+        </p:nvSpPr>
+        <p:spPr>
+          <a:xfrm>
+            <a:off x="2530763" y="2023997"/>
+            <a:ext cx="6126057" cy="3244093"/>
+          </a:xfrm>
+          <a:prstGeom prst="rect">
+            <a:avLst/>
+          </a:prstGeom>
+          <a:noFill/>
+        </p:spPr>
+        <p:txBody>
+          <a:bodyPr wrap="square">
+            <a:spAutoFit/>
+          </a:bodyPr>
+          <a:lstStyle/>
+          <a:p>
+            <a:pPr algn="ctr">
+              <a:lnSpc>
+                <a:spcPct val="150000"/>
+              </a:lnSpc>
+            </a:pPr>
+            <a:r>
+              <a:rPr lang="en-US" altLang="ko-KR" sz="2800" b="0" i="0" u="none" strike="noStrike" baseline="0" dirty="0">
+                <a:solidFill>
+                  <a:srgbClr val="595959"/>
+                </a:solidFill>
+                <a:latin typeface="Helvetica" panose="020B0604020202020204" pitchFamily="34" charset="0"/>
+              </a:rPr>
+              <a:t>Vectors</a:t>
+            </a:r>
+          </a:p>
+          <a:p>
+            <a:pPr algn="ctr">
+              <a:lnSpc>
+                <a:spcPct val="150000"/>
+              </a:lnSpc>
+            </a:pPr>
+            <a:r>
+              <a:rPr lang="en-US" altLang="ko-KR" sz="2800" b="0" i="0" u="none" strike="noStrike" baseline="0" dirty="0">
+                <a:solidFill>
+                  <a:srgbClr val="595959"/>
+                </a:solidFill>
+                <a:latin typeface="Helvetica" panose="020B0604020202020204" pitchFamily="34" charset="0"/>
+              </a:rPr>
+              <a:t>Matrices</a:t>
+            </a:r>
+          </a:p>
+          <a:p>
+            <a:pPr algn="ctr">
+              <a:lnSpc>
+                <a:spcPct val="150000"/>
+              </a:lnSpc>
+            </a:pPr>
+            <a:r>
+              <a:rPr lang="en-US" altLang="ko-KR" sz="2800" b="0" i="0" u="none" strike="noStrike" baseline="0" dirty="0">
+                <a:solidFill>
+                  <a:srgbClr val="595959"/>
+                </a:solidFill>
+                <a:latin typeface="Helvetica" panose="020B0604020202020204" pitchFamily="34" charset="0"/>
+              </a:rPr>
+              <a:t>Dot product</a:t>
+            </a:r>
+          </a:p>
+          <a:p>
+            <a:pPr algn="ctr">
+              <a:lnSpc>
+                <a:spcPct val="150000"/>
+              </a:lnSpc>
+            </a:pPr>
+            <a:r>
+              <a:rPr lang="en-US" altLang="ko-KR" sz="2800" b="0" i="0" u="none" strike="noStrike" baseline="0" dirty="0">
+                <a:solidFill>
+                  <a:srgbClr val="595959"/>
+                </a:solidFill>
+                <a:latin typeface="Helvetica" panose="020B0604020202020204" pitchFamily="34" charset="0"/>
+              </a:rPr>
+              <a:t>Matrix multiplication</a:t>
+            </a:r>
+          </a:p>
+          <a:p>
+            <a:pPr algn="ctr">
+              <a:lnSpc>
+                <a:spcPct val="150000"/>
+              </a:lnSpc>
+            </a:pPr>
+            <a:r>
+              <a:rPr lang="en-US" altLang="ko-KR" sz="2800" b="0" i="0" u="none" strike="noStrike" baseline="0" dirty="0">
+                <a:solidFill>
+                  <a:srgbClr val="595959"/>
+                </a:solidFill>
+                <a:latin typeface="Helvetica" panose="020B0604020202020204" pitchFamily="34" charset="0"/>
+              </a:rPr>
+              <a:t>Linear transformations</a:t>
+            </a:r>
+            <a:endParaRPr lang="ko-KR" altLang="en-US" sz="2800" dirty="0"/>
+          </a:p>
+        </p:txBody>
+      </p:sp>
+    </p:spTree>
+    <p:extLst>
+      <p:ext uri="{BB962C8B-B14F-4D97-AF65-F5344CB8AC3E}">
+        <p14:creationId xmlns:p14="http://schemas.microsoft.com/office/powerpoint/2010/main" val="936156201"/>
+      </p:ext>
+    </p:extLst>
+  </p:cSld>
+  <p:clrMapOvr>
+    <a:masterClrMapping/>
+  </p:clrMapOvr>
+  <mc:AlternateContent xmlns:mc="http://schemas.openxmlformats.org/markup-compatibility/2006" xmlns:p159="http://schemas.microsoft.com/office/powerpoint/2015/09/main">
+    <mc:Choice Requires="p159">
+      <p:transition xmlns:p14="http://schemas.microsoft.com/office/powerpoint/2010/main" spd="slow" p14:dur="2000">
+        <p159:morph option="byObject"/>
+      </p:transition>
+    </mc:Choice>
+    <mc:Fallback xmlns="">
+      <p:transition spd="slow">
+        <p:fade/>
+      </p:transition>
+    </mc:Fallback>
+  </mc:AlternateContent>
+</p:sld>
+</file>
+
+<file path=ppt/slides/slide40.xml><?xml version="1.0" encoding="utf-8"?>
 <p:sld xmlns:a="http://schemas.openxmlformats.org/drawingml/2006/main" xmlns:r="http://schemas.openxmlformats.org/officeDocument/2006/relationships" xmlns:p="http://schemas.openxmlformats.org/presentationml/2006/main">
   <p:cSld>
     <p:spTree>
@@ -19564,7 +20771,7 @@
             <a:fld id="{9860EDB8-5305-433F-BE41-D7A86D811DB3}" type="slidenum">
               <a:rPr lang="en-US" altLang="ko-KR" noProof="0" smtClean="0"/>
               <a:pPr/>
-              <a:t>39</a:t>
+              <a:t>40</a:t>
             </a:fld>
             <a:endParaRPr lang="ko-KR" altLang="en-US" noProof="0"/>
           </a:p>
@@ -19726,236 +20933,7 @@
 </p:sld>
 </file>
 
-<file path=ppt/slides/slide4.xml><?xml version="1.0" encoding="utf-8"?>
-<p:sld xmlns:a="http://schemas.openxmlformats.org/drawingml/2006/main" xmlns:r="http://schemas.openxmlformats.org/officeDocument/2006/relationships" xmlns:p="http://schemas.openxmlformats.org/presentationml/2006/main">
-  <p:cSld>
-    <p:spTree>
-      <p:nvGrpSpPr>
-        <p:cNvPr id="1" name="">
-          <a:extLst>
-            <a:ext uri="{FF2B5EF4-FFF2-40B4-BE49-F238E27FC236}">
-              <a16:creationId xmlns:a16="http://schemas.microsoft.com/office/drawing/2014/main" id="{7D5DC8FC-1345-873F-A6C3-D2B0CCFB6086}"/>
-            </a:ext>
-          </a:extLst>
-        </p:cNvPr>
-        <p:cNvGrpSpPr/>
-        <p:nvPr/>
-      </p:nvGrpSpPr>
-      <p:grpSpPr>
-        <a:xfrm>
-          <a:off x="0" y="0"/>
-          <a:ext cx="0" cy="0"/>
-          <a:chOff x="0" y="0"/>
-          <a:chExt cx="0" cy="0"/>
-        </a:xfrm>
-      </p:grpSpPr>
-      <p:sp>
-        <p:nvSpPr>
-          <p:cNvPr id="8" name="제목 7">
-            <a:extLst>
-              <a:ext uri="{FF2B5EF4-FFF2-40B4-BE49-F238E27FC236}">
-                <a16:creationId xmlns:a16="http://schemas.microsoft.com/office/drawing/2014/main" id="{22FC3679-5A6F-B565-1054-5E0280FB97D2}"/>
-              </a:ext>
-            </a:extLst>
-          </p:cNvPr>
-          <p:cNvSpPr>
-            <a:spLocks noGrp="1"/>
-          </p:cNvSpPr>
-          <p:nvPr>
-            <p:ph type="title"/>
-          </p:nvPr>
-        </p:nvSpPr>
-        <p:spPr>
-          <a:xfrm>
-            <a:off x="521207" y="448056"/>
-            <a:ext cx="8135613" cy="640080"/>
-          </a:xfrm>
-        </p:spPr>
-        <p:txBody>
-          <a:bodyPr rtlCol="0">
-            <a:noAutofit/>
-          </a:bodyPr>
-          <a:lstStyle/>
-          <a:p>
-            <a:pPr rtl="0"/>
-            <a:r>
-              <a:rPr lang="en-US" altLang="ko-KR" dirty="0">
-                <a:cs typeface="Segoe UI Light" panose="020B0502040204020203" pitchFamily="34" charset="0"/>
-              </a:rPr>
-              <a:t>Math for Machine Learning</a:t>
-            </a:r>
-            <a:endParaRPr lang="ko-KR" altLang="en-US" dirty="0">
-              <a:cs typeface="Segoe UI Light" panose="020B0502040204020203" pitchFamily="34" charset="0"/>
-            </a:endParaRPr>
-          </a:p>
-        </p:txBody>
-      </p:sp>
-      <p:sp>
-        <p:nvSpPr>
-          <p:cNvPr id="12" name="슬라이드 번호 개체 틀 11">
-            <a:extLst>
-              <a:ext uri="{FF2B5EF4-FFF2-40B4-BE49-F238E27FC236}">
-                <a16:creationId xmlns:a16="http://schemas.microsoft.com/office/drawing/2014/main" id="{841241FB-BBA8-80A9-657D-4E4C0970905D}"/>
-              </a:ext>
-            </a:extLst>
-          </p:cNvPr>
-          <p:cNvSpPr>
-            <a:spLocks noGrp="1"/>
-          </p:cNvSpPr>
-          <p:nvPr>
-            <p:ph type="sldNum" sz="quarter" idx="4"/>
-          </p:nvPr>
-        </p:nvSpPr>
-        <p:spPr/>
-        <p:txBody>
-          <a:bodyPr/>
-          <a:lstStyle/>
-          <a:p>
-            <a:fld id="{9860EDB8-5305-433F-BE41-D7A86D811DB3}" type="slidenum">
-              <a:rPr lang="en-US" altLang="ko-KR" noProof="0" smtClean="0"/>
-              <a:pPr/>
-              <a:t>4</a:t>
-            </a:fld>
-            <a:endParaRPr lang="ko-KR" altLang="en-US" noProof="0"/>
-          </a:p>
-        </p:txBody>
-      </p:sp>
-      <p:sp>
-        <p:nvSpPr>
-          <p:cNvPr id="5" name="TextBox 4">
-            <a:extLst>
-              <a:ext uri="{FF2B5EF4-FFF2-40B4-BE49-F238E27FC236}">
-                <a16:creationId xmlns:a16="http://schemas.microsoft.com/office/drawing/2014/main" id="{68758DD3-2217-BA8B-05B1-F405206F1A26}"/>
-              </a:ext>
-            </a:extLst>
-          </p:cNvPr>
-          <p:cNvSpPr txBox="1"/>
-          <p:nvPr/>
-        </p:nvSpPr>
-        <p:spPr>
-          <a:xfrm>
-            <a:off x="2530763" y="2023997"/>
-            <a:ext cx="6126057" cy="3244093"/>
-          </a:xfrm>
-          <a:prstGeom prst="rect">
-            <a:avLst/>
-          </a:prstGeom>
-          <a:noFill/>
-        </p:spPr>
-        <p:txBody>
-          <a:bodyPr wrap="square">
-            <a:spAutoFit/>
-          </a:bodyPr>
-          <a:lstStyle/>
-          <a:p>
-            <a:pPr algn="ctr">
-              <a:lnSpc>
-                <a:spcPct val="150000"/>
-              </a:lnSpc>
-            </a:pPr>
-            <a:r>
-              <a:rPr lang="en-US" altLang="ko-KR" sz="2800" b="0" i="0" u="none" strike="noStrike" baseline="0" dirty="0">
-                <a:solidFill>
-                  <a:srgbClr val="595959"/>
-                </a:solidFill>
-                <a:latin typeface="Helvetica" panose="020B0604020202020204" pitchFamily="34" charset="0"/>
-              </a:rPr>
-              <a:t>Vectors</a:t>
-            </a:r>
-          </a:p>
-          <a:p>
-            <a:pPr algn="ctr">
-              <a:lnSpc>
-                <a:spcPct val="150000"/>
-              </a:lnSpc>
-            </a:pPr>
-            <a:r>
-              <a:rPr lang="en-US" altLang="ko-KR" sz="2800" b="0" i="0" u="none" strike="noStrike" baseline="0" dirty="0">
-                <a:solidFill>
-                  <a:srgbClr val="595959"/>
-                </a:solidFill>
-                <a:latin typeface="Helvetica" panose="020B0604020202020204" pitchFamily="34" charset="0"/>
-              </a:rPr>
-              <a:t>Matrices</a:t>
-            </a:r>
-          </a:p>
-          <a:p>
-            <a:pPr algn="ctr">
-              <a:lnSpc>
-                <a:spcPct val="150000"/>
-              </a:lnSpc>
-            </a:pPr>
-            <a:r>
-              <a:rPr lang="en-US" altLang="ko-KR" sz="2800" b="0" i="0" u="none" strike="noStrike" baseline="0" dirty="0">
-                <a:solidFill>
-                  <a:srgbClr val="595959"/>
-                </a:solidFill>
-                <a:latin typeface="Helvetica" panose="020B0604020202020204" pitchFamily="34" charset="0"/>
-              </a:rPr>
-              <a:t>Dot product</a:t>
-            </a:r>
-          </a:p>
-          <a:p>
-            <a:pPr algn="ctr">
-              <a:lnSpc>
-                <a:spcPct val="150000"/>
-              </a:lnSpc>
-            </a:pPr>
-            <a:r>
-              <a:rPr lang="en-US" altLang="ko-KR" sz="2800" b="0" i="0" u="none" strike="noStrike" baseline="0" dirty="0">
-                <a:solidFill>
-                  <a:srgbClr val="595959"/>
-                </a:solidFill>
-                <a:latin typeface="Helvetica" panose="020B0604020202020204" pitchFamily="34" charset="0"/>
-              </a:rPr>
-              <a:t>Matrix multiplication</a:t>
-            </a:r>
-          </a:p>
-          <a:p>
-            <a:pPr algn="ctr">
-              <a:lnSpc>
-                <a:spcPct val="150000"/>
-              </a:lnSpc>
-            </a:pPr>
-            <a:r>
-              <a:rPr lang="en-US" altLang="ko-KR" sz="2800" b="0" i="0" u="none" strike="noStrike" baseline="0" dirty="0">
-                <a:solidFill>
-                  <a:srgbClr val="595959"/>
-                </a:solidFill>
-                <a:latin typeface="Helvetica" panose="020B0604020202020204" pitchFamily="34" charset="0"/>
-              </a:rPr>
-              <a:t>Linear transformations</a:t>
-            </a:r>
-            <a:endParaRPr lang="ko-KR" altLang="en-US" sz="2800" dirty="0"/>
-          </a:p>
-        </p:txBody>
-      </p:sp>
-    </p:spTree>
-    <p:extLst>
-      <p:ext uri="{BB962C8B-B14F-4D97-AF65-F5344CB8AC3E}">
-        <p14:creationId xmlns:p14="http://schemas.microsoft.com/office/powerpoint/2010/main" val="936156201"/>
-      </p:ext>
-    </p:extLst>
-  </p:cSld>
-  <p:clrMapOvr>
-    <a:masterClrMapping/>
-  </p:clrMapOvr>
-  <mc:AlternateContent xmlns:mc="http://schemas.openxmlformats.org/markup-compatibility/2006" xmlns:p159="http://schemas.microsoft.com/office/powerpoint/2015/09/main">
-    <mc:Choice Requires="p159">
-      <p:transition xmlns:p14="http://schemas.microsoft.com/office/powerpoint/2010/main" spd="slow" p14:dur="2000">
-        <p159:morph option="byObject"/>
-      </p:transition>
-    </mc:Choice>
-    <mc:Fallback xmlns="">
-      <p:transition spd="slow">
-        <p:fade/>
-      </p:transition>
-    </mc:Fallback>
-  </mc:AlternateContent>
-</p:sld>
-</file>
-
-<file path=ppt/slides/slide40.xml><?xml version="1.0" encoding="utf-8"?>
+<file path=ppt/slides/slide41.xml><?xml version="1.0" encoding="utf-8"?>
 <p:sld xmlns:a="http://schemas.openxmlformats.org/drawingml/2006/main" xmlns:r="http://schemas.openxmlformats.org/officeDocument/2006/relationships" xmlns:p="http://schemas.openxmlformats.org/presentationml/2006/main">
   <p:cSld>
     <p:spTree>
@@ -20097,7 +21075,7 @@
             <a:fld id="{9860EDB8-5305-433F-BE41-D7A86D811DB3}" type="slidenum">
               <a:rPr lang="en-US" altLang="ko-KR" noProof="0" smtClean="0"/>
               <a:pPr/>
-              <a:t>40</a:t>
+              <a:t>41</a:t>
             </a:fld>
             <a:endParaRPr lang="ko-KR" altLang="en-US" noProof="0"/>
           </a:p>
@@ -20306,7 +21284,7 @@
 </p:sld>
 </file>
 
-<file path=ppt/slides/slide41.xml><?xml version="1.0" encoding="utf-8"?>
+<file path=ppt/slides/slide42.xml><?xml version="1.0" encoding="utf-8"?>
 <p:sld xmlns:a="http://schemas.openxmlformats.org/drawingml/2006/main" xmlns:r="http://schemas.openxmlformats.org/officeDocument/2006/relationships" xmlns:p="http://schemas.openxmlformats.org/presentationml/2006/main">
   <p:cSld>
     <p:spTree>
@@ -20451,7 +21429,7 @@
             <a:fld id="{9860EDB8-5305-433F-BE41-D7A86D811DB3}" type="slidenum">
               <a:rPr lang="en-US" altLang="ko-KR" noProof="0" smtClean="0"/>
               <a:pPr/>
-              <a:t>41</a:t>
+              <a:t>42</a:t>
             </a:fld>
             <a:endParaRPr lang="ko-KR" altLang="en-US" noProof="0"/>
           </a:p>
@@ -20853,7 +21831,7 @@
 </p:sld>
 </file>
 
-<file path=ppt/slides/slide42.xml><?xml version="1.0" encoding="utf-8"?>
+<file path=ppt/slides/slide43.xml><?xml version="1.0" encoding="utf-8"?>
 <p:sld xmlns:a="http://schemas.openxmlformats.org/drawingml/2006/main" xmlns:r="http://schemas.openxmlformats.org/officeDocument/2006/relationships" xmlns:p="http://schemas.openxmlformats.org/presentationml/2006/main">
   <p:cSld>
     <p:spTree>
@@ -20938,7 +21916,7 @@
             <a:fld id="{9860EDB8-5305-433F-BE41-D7A86D811DB3}" type="slidenum">
               <a:rPr lang="en-US" altLang="ko-KR" noProof="0" smtClean="0"/>
               <a:pPr/>
-              <a:t>42</a:t>
+              <a:t>43</a:t>
             </a:fld>
             <a:endParaRPr lang="ko-KR" altLang="en-US" noProof="0"/>
           </a:p>
@@ -21100,7 +22078,7 @@
 </p:sld>
 </file>
 
-<file path=ppt/slides/slide43.xml><?xml version="1.0" encoding="utf-8"?>
+<file path=ppt/slides/slide44.xml><?xml version="1.0" encoding="utf-8"?>
 <p:sld xmlns:a="http://schemas.openxmlformats.org/drawingml/2006/main" xmlns:r="http://schemas.openxmlformats.org/officeDocument/2006/relationships" xmlns:p="http://schemas.openxmlformats.org/presentationml/2006/main">
   <p:cSld>
     <p:spTree>
@@ -21185,7 +22163,7 @@
             <a:fld id="{9860EDB8-5305-433F-BE41-D7A86D811DB3}" type="slidenum">
               <a:rPr lang="en-US" altLang="ko-KR" noProof="0" smtClean="0"/>
               <a:pPr/>
-              <a:t>43</a:t>
+              <a:t>44</a:t>
             </a:fld>
             <a:endParaRPr lang="ko-KR" altLang="en-US" noProof="0"/>
           </a:p>
@@ -21242,7 +22220,7 @@
 </p:sld>
 </file>
 
-<file path=ppt/slides/slide44.xml><?xml version="1.0" encoding="utf-8"?>
+<file path=ppt/slides/slide45.xml><?xml version="1.0" encoding="utf-8"?>
 <p:sld xmlns:a="http://schemas.openxmlformats.org/drawingml/2006/main" xmlns:r="http://schemas.openxmlformats.org/officeDocument/2006/relationships" xmlns:p="http://schemas.openxmlformats.org/presentationml/2006/main">
   <p:cSld>
     <p:spTree>
@@ -21327,7 +22305,7 @@
             <a:fld id="{9860EDB8-5305-433F-BE41-D7A86D811DB3}" type="slidenum">
               <a:rPr lang="en-US" altLang="ko-KR" noProof="0" smtClean="0"/>
               <a:pPr/>
-              <a:t>44</a:t>
+              <a:t>45</a:t>
             </a:fld>
             <a:endParaRPr lang="ko-KR" altLang="en-US" noProof="0"/>
           </a:p>
@@ -21384,7 +22362,7 @@
 </p:sld>
 </file>
 
-<file path=ppt/slides/slide45.xml><?xml version="1.0" encoding="utf-8"?>
+<file path=ppt/slides/slide46.xml><?xml version="1.0" encoding="utf-8"?>
 <p:sld xmlns:a="http://schemas.openxmlformats.org/drawingml/2006/main" xmlns:r="http://schemas.openxmlformats.org/officeDocument/2006/relationships" xmlns:p="http://schemas.openxmlformats.org/presentationml/2006/main">
   <p:cSld>
     <p:spTree>
@@ -21526,7 +22504,7 @@
             <a:fld id="{9860EDB8-5305-433F-BE41-D7A86D811DB3}" type="slidenum">
               <a:rPr lang="en-US" altLang="ko-KR" noProof="0" smtClean="0"/>
               <a:pPr/>
-              <a:t>45</a:t>
+              <a:t>46</a:t>
             </a:fld>
             <a:endParaRPr lang="ko-KR" altLang="en-US" noProof="0"/>
           </a:p>
@@ -21735,7 +22713,7 @@
 </p:sld>
 </file>
 
-<file path=ppt/slides/slide46.xml><?xml version="1.0" encoding="utf-8"?>
+<file path=ppt/slides/slide47.xml><?xml version="1.0" encoding="utf-8"?>
 <p:sld xmlns:a="http://schemas.openxmlformats.org/drawingml/2006/main" xmlns:r="http://schemas.openxmlformats.org/officeDocument/2006/relationships" xmlns:p="http://schemas.openxmlformats.org/presentationml/2006/main">
   <p:cSld>
     <p:spTree>
@@ -21820,7 +22798,7 @@
             <a:fld id="{9860EDB8-5305-433F-BE41-D7A86D811DB3}" type="slidenum">
               <a:rPr lang="en-US" altLang="ko-KR" noProof="0" smtClean="0"/>
               <a:pPr/>
-              <a:t>46</a:t>
+              <a:t>47</a:t>
             </a:fld>
             <a:endParaRPr lang="ko-KR" altLang="en-US" noProof="0"/>
           </a:p>
@@ -21877,7 +22855,7 @@
 </p:sld>
 </file>
 
-<file path=ppt/slides/slide47.xml><?xml version="1.0" encoding="utf-8"?>
+<file path=ppt/slides/slide48.xml><?xml version="1.0" encoding="utf-8"?>
 <p:sld xmlns:a="http://schemas.openxmlformats.org/drawingml/2006/main" xmlns:r="http://schemas.openxmlformats.org/officeDocument/2006/relationships" xmlns:p="http://schemas.openxmlformats.org/presentationml/2006/main">
   <p:cSld>
     <p:spTree>
@@ -21962,7 +22940,7 @@
             <a:fld id="{9860EDB8-5305-433F-BE41-D7A86D811DB3}" type="slidenum">
               <a:rPr lang="en-US" altLang="ko-KR" noProof="0" smtClean="0"/>
               <a:pPr/>
-              <a:t>47</a:t>
+              <a:t>48</a:t>
             </a:fld>
             <a:endParaRPr lang="ko-KR" altLang="en-US" noProof="0"/>
           </a:p>
@@ -22019,7 +22997,7 @@
 </p:sld>
 </file>
 
-<file path=ppt/slides/slide48.xml><?xml version="1.0" encoding="utf-8"?>
+<file path=ppt/slides/slide49.xml><?xml version="1.0" encoding="utf-8"?>
 <p:sld xmlns:a="http://schemas.openxmlformats.org/drawingml/2006/main" xmlns:r="http://schemas.openxmlformats.org/officeDocument/2006/relationships" xmlns:p="http://schemas.openxmlformats.org/presentationml/2006/main">
   <p:cSld>
     <p:spTree>
@@ -22104,7 +23082,7 @@
             <a:fld id="{9860EDB8-5305-433F-BE41-D7A86D811DB3}" type="slidenum">
               <a:rPr lang="en-US" altLang="ko-KR" noProof="0" smtClean="0"/>
               <a:pPr/>
-              <a:t>48</a:t>
+              <a:t>49</a:t>
             </a:fld>
             <a:endParaRPr lang="ko-KR" altLang="en-US" noProof="0"/>
           </a:p>
@@ -22161,7 +23139,358 @@
 </p:sld>
 </file>
 
-<file path=ppt/slides/slide49.xml><?xml version="1.0" encoding="utf-8"?>
+<file path=ppt/slides/slide5.xml><?xml version="1.0" encoding="utf-8"?>
+<p:sld xmlns:a="http://schemas.openxmlformats.org/drawingml/2006/main" xmlns:r="http://schemas.openxmlformats.org/officeDocument/2006/relationships" xmlns:p="http://schemas.openxmlformats.org/presentationml/2006/main">
+  <p:cSld>
+    <p:spTree>
+      <p:nvGrpSpPr>
+        <p:cNvPr id="1" name="">
+          <a:extLst>
+            <a:ext uri="{FF2B5EF4-FFF2-40B4-BE49-F238E27FC236}">
+              <a16:creationId xmlns:a16="http://schemas.microsoft.com/office/drawing/2014/main" id="{FD0D3AE7-002F-94A0-DA15-81A1CE310A3F}"/>
+            </a:ext>
+          </a:extLst>
+        </p:cNvPr>
+        <p:cNvGrpSpPr/>
+        <p:nvPr/>
+      </p:nvGrpSpPr>
+      <p:grpSpPr>
+        <a:xfrm>
+          <a:off x="0" y="0"/>
+          <a:ext cx="0" cy="0"/>
+          <a:chOff x="0" y="0"/>
+          <a:chExt cx="0" cy="0"/>
+        </a:xfrm>
+      </p:grpSpPr>
+      <p:sp>
+        <p:nvSpPr>
+          <p:cNvPr id="3" name="직사각형 2">
+            <a:extLst>
+              <a:ext uri="{FF2B5EF4-FFF2-40B4-BE49-F238E27FC236}">
+                <a16:creationId xmlns:a16="http://schemas.microsoft.com/office/drawing/2014/main" id="{C9AFE555-A66B-E0EE-1EF0-831B635FB249}"/>
+              </a:ext>
+            </a:extLst>
+          </p:cNvPr>
+          <p:cNvSpPr/>
+          <p:nvPr/>
+        </p:nvSpPr>
+        <p:spPr>
+          <a:xfrm>
+            <a:off x="895927" y="1457931"/>
+            <a:ext cx="5948218" cy="548669"/>
+          </a:xfrm>
+          <a:prstGeom prst="rect">
+            <a:avLst/>
+          </a:prstGeom>
+          <a:solidFill>
+            <a:schemeClr val="bg1">
+              <a:lumMod val="85000"/>
+            </a:schemeClr>
+          </a:solidFill>
+          <a:ln>
+            <a:noFill/>
+          </a:ln>
+        </p:spPr>
+        <p:style>
+          <a:lnRef idx="2">
+            <a:schemeClr val="accent1">
+              <a:shade val="15000"/>
+            </a:schemeClr>
+          </a:lnRef>
+          <a:fillRef idx="1">
+            <a:schemeClr val="accent1"/>
+          </a:fillRef>
+          <a:effectRef idx="0">
+            <a:schemeClr val="accent1"/>
+          </a:effectRef>
+          <a:fontRef idx="minor">
+            <a:schemeClr val="lt1"/>
+          </a:fontRef>
+        </p:style>
+        <p:txBody>
+          <a:bodyPr rtlCol="0" anchor="ctr"/>
+          <a:lstStyle/>
+          <a:p>
+            <a:pPr algn="ctr"/>
+            <a:endParaRPr lang="ko-KR" altLang="en-US" dirty="0"/>
+          </a:p>
+        </p:txBody>
+      </p:sp>
+      <p:sp>
+        <p:nvSpPr>
+          <p:cNvPr id="8" name="제목 7">
+            <a:extLst>
+              <a:ext uri="{FF2B5EF4-FFF2-40B4-BE49-F238E27FC236}">
+                <a16:creationId xmlns:a16="http://schemas.microsoft.com/office/drawing/2014/main" id="{E41AB3BA-A98A-DDCE-D6EA-2DF42D6CE40B}"/>
+              </a:ext>
+            </a:extLst>
+          </p:cNvPr>
+          <p:cNvSpPr>
+            <a:spLocks noGrp="1"/>
+          </p:cNvSpPr>
+          <p:nvPr>
+            <p:ph type="title"/>
+          </p:nvPr>
+        </p:nvSpPr>
+        <p:spPr>
+          <a:xfrm>
+            <a:off x="521207" y="448056"/>
+            <a:ext cx="8135613" cy="640080"/>
+          </a:xfrm>
+        </p:spPr>
+        <p:txBody>
+          <a:bodyPr rtlCol="0">
+            <a:noAutofit/>
+          </a:bodyPr>
+          <a:lstStyle/>
+          <a:p>
+            <a:pPr rtl="0"/>
+            <a:r>
+              <a:rPr lang="en-US" altLang="ko-KR" dirty="0">
+                <a:cs typeface="Segoe UI Light" panose="020B0502040204020203" pitchFamily="34" charset="0"/>
+              </a:rPr>
+              <a:t>Contents</a:t>
+            </a:r>
+            <a:endParaRPr lang="ko-KR" altLang="en-US" dirty="0">
+              <a:cs typeface="Segoe UI Light" panose="020B0502040204020203" pitchFamily="34" charset="0"/>
+            </a:endParaRPr>
+          </a:p>
+        </p:txBody>
+      </p:sp>
+      <p:sp>
+        <p:nvSpPr>
+          <p:cNvPr id="12" name="슬라이드 번호 개체 틀 11">
+            <a:extLst>
+              <a:ext uri="{FF2B5EF4-FFF2-40B4-BE49-F238E27FC236}">
+                <a16:creationId xmlns:a16="http://schemas.microsoft.com/office/drawing/2014/main" id="{FBA6C3AD-7EE6-C223-FA76-995C4A40A54C}"/>
+              </a:ext>
+            </a:extLst>
+          </p:cNvPr>
+          <p:cNvSpPr>
+            <a:spLocks noGrp="1"/>
+          </p:cNvSpPr>
+          <p:nvPr>
+            <p:ph type="sldNum" sz="quarter" idx="4"/>
+          </p:nvPr>
+        </p:nvSpPr>
+        <p:spPr/>
+        <p:txBody>
+          <a:bodyPr/>
+          <a:lstStyle/>
+          <a:p>
+            <a:fld id="{9860EDB8-5305-433F-BE41-D7A86D811DB3}" type="slidenum">
+              <a:rPr lang="en-US" altLang="ko-KR" noProof="0" smtClean="0"/>
+              <a:pPr/>
+              <a:t>5</a:t>
+            </a:fld>
+            <a:endParaRPr lang="ko-KR" altLang="en-US" noProof="0"/>
+          </a:p>
+        </p:txBody>
+      </p:sp>
+      <p:sp>
+        <p:nvSpPr>
+          <p:cNvPr id="2" name="TextBox 1">
+            <a:extLst>
+              <a:ext uri="{FF2B5EF4-FFF2-40B4-BE49-F238E27FC236}">
+                <a16:creationId xmlns:a16="http://schemas.microsoft.com/office/drawing/2014/main" id="{52C5C255-490D-636C-8D95-CEBDAA0AD5B9}"/>
+              </a:ext>
+            </a:extLst>
+          </p:cNvPr>
+          <p:cNvSpPr txBox="1"/>
+          <p:nvPr/>
+        </p:nvSpPr>
+        <p:spPr>
+          <a:xfrm>
+            <a:off x="1764145" y="1384043"/>
+            <a:ext cx="7250546" cy="5006948"/>
+          </a:xfrm>
+          <a:prstGeom prst="rect">
+            <a:avLst/>
+          </a:prstGeom>
+          <a:noFill/>
+        </p:spPr>
+        <p:txBody>
+          <a:bodyPr wrap="square" rtlCol="0">
+            <a:spAutoFit/>
+          </a:bodyPr>
+          <a:lstStyle/>
+          <a:p>
+            <a:pPr marL="457200" indent="-457200">
+              <a:lnSpc>
+                <a:spcPct val="150000"/>
+              </a:lnSpc>
+              <a:buFont typeface="+mj-lt"/>
+              <a:buAutoNum type="arabicPeriod"/>
+            </a:pPr>
+            <a:r>
+              <a:rPr lang="en-US" altLang="ko-KR" sz="2400" b="1" dirty="0">
+                <a:latin typeface="맑은 고딕 Semilight" panose="020B0502040204020203" pitchFamily="50" charset="-127"/>
+                <a:ea typeface="맑은 고딕 Semilight" panose="020B0502040204020203" pitchFamily="50" charset="-127"/>
+                <a:cs typeface="맑은 고딕 Semilight" panose="020B0502040204020203" pitchFamily="50" charset="-127"/>
+              </a:rPr>
+              <a:t>Vectors and their properties</a:t>
+            </a:r>
+          </a:p>
+          <a:p>
+            <a:pPr marL="457200" indent="-457200">
+              <a:lnSpc>
+                <a:spcPct val="150000"/>
+              </a:lnSpc>
+              <a:buFont typeface="+mj-lt"/>
+              <a:buAutoNum type="arabicPeriod"/>
+            </a:pPr>
+            <a:r>
+              <a:rPr lang="en-US" altLang="ko-KR" sz="2400" b="1" dirty="0">
+                <a:latin typeface="맑은 고딕 Semilight" panose="020B0502040204020203" pitchFamily="50" charset="-127"/>
+                <a:ea typeface="맑은 고딕 Semilight" panose="020B0502040204020203" pitchFamily="50" charset="-127"/>
+                <a:cs typeface="맑은 고딕 Semilight" panose="020B0502040204020203" pitchFamily="50" charset="-127"/>
+              </a:rPr>
+              <a:t>Sum and difference of vectors</a:t>
+            </a:r>
+          </a:p>
+          <a:p>
+            <a:pPr marL="457200" indent="-457200">
+              <a:lnSpc>
+                <a:spcPct val="150000"/>
+              </a:lnSpc>
+              <a:buFont typeface="+mj-lt"/>
+              <a:buAutoNum type="arabicPeriod"/>
+            </a:pPr>
+            <a:r>
+              <a:rPr lang="en-US" altLang="ko-KR" sz="2400" b="1" dirty="0">
+                <a:latin typeface="맑은 고딕 Semilight" panose="020B0502040204020203" pitchFamily="50" charset="-127"/>
+                <a:ea typeface="맑은 고딕 Semilight" panose="020B0502040204020203" pitchFamily="50" charset="-127"/>
+                <a:cs typeface="맑은 고딕 Semilight" panose="020B0502040204020203" pitchFamily="50" charset="-127"/>
+              </a:rPr>
+              <a:t>Distance between vectors</a:t>
+            </a:r>
+          </a:p>
+          <a:p>
+            <a:pPr marL="457200" indent="-457200">
+              <a:lnSpc>
+                <a:spcPct val="150000"/>
+              </a:lnSpc>
+              <a:buFont typeface="+mj-lt"/>
+              <a:buAutoNum type="arabicPeriod"/>
+            </a:pPr>
+            <a:r>
+              <a:rPr lang="en-US" altLang="ko-KR" sz="2400" b="1" dirty="0">
+                <a:latin typeface="맑은 고딕 Semilight" panose="020B0502040204020203" pitchFamily="50" charset="-127"/>
+                <a:ea typeface="맑은 고딕 Semilight" panose="020B0502040204020203" pitchFamily="50" charset="-127"/>
+                <a:cs typeface="맑은 고딕 Semilight" panose="020B0502040204020203" pitchFamily="50" charset="-127"/>
+              </a:rPr>
+              <a:t>Multiplying a vector by a scalar</a:t>
+            </a:r>
+          </a:p>
+          <a:p>
+            <a:pPr marL="457200" indent="-457200">
+              <a:lnSpc>
+                <a:spcPct val="150000"/>
+              </a:lnSpc>
+              <a:buFont typeface="+mj-lt"/>
+              <a:buAutoNum type="arabicPeriod"/>
+            </a:pPr>
+            <a:r>
+              <a:rPr lang="en-US" altLang="ko-KR" sz="2400" b="1" dirty="0">
+                <a:latin typeface="맑은 고딕 Semilight" panose="020B0502040204020203" pitchFamily="50" charset="-127"/>
+                <a:ea typeface="맑은 고딕 Semilight" panose="020B0502040204020203" pitchFamily="50" charset="-127"/>
+                <a:cs typeface="맑은 고딕 Semilight" panose="020B0502040204020203" pitchFamily="50" charset="-127"/>
+              </a:rPr>
+              <a:t>The dot product</a:t>
+            </a:r>
+          </a:p>
+          <a:p>
+            <a:pPr marL="457200" indent="-457200">
+              <a:lnSpc>
+                <a:spcPct val="150000"/>
+              </a:lnSpc>
+              <a:buFont typeface="+mj-lt"/>
+              <a:buAutoNum type="arabicPeriod"/>
+            </a:pPr>
+            <a:r>
+              <a:rPr lang="en-US" altLang="ko-KR" sz="2400" b="1" dirty="0">
+                <a:latin typeface="맑은 고딕 Semilight" panose="020B0502040204020203" pitchFamily="50" charset="-127"/>
+                <a:ea typeface="맑은 고딕 Semilight" panose="020B0502040204020203" pitchFamily="50" charset="-127"/>
+                <a:cs typeface="맑은 고딕 Semilight" panose="020B0502040204020203" pitchFamily="50" charset="-127"/>
+              </a:rPr>
+              <a:t>Geometric dot product</a:t>
+            </a:r>
+          </a:p>
+          <a:p>
+            <a:pPr marL="457200" indent="-457200">
+              <a:lnSpc>
+                <a:spcPct val="150000"/>
+              </a:lnSpc>
+              <a:buFont typeface="+mj-lt"/>
+              <a:buAutoNum type="arabicPeriod"/>
+            </a:pPr>
+            <a:r>
+              <a:rPr lang="en-US" altLang="ko-KR" sz="2400" b="1" dirty="0">
+                <a:latin typeface="맑은 고딕 Semilight" panose="020B0502040204020203" pitchFamily="50" charset="-127"/>
+                <a:ea typeface="맑은 고딕 Semilight" panose="020B0502040204020203" pitchFamily="50" charset="-127"/>
+                <a:cs typeface="맑은 고딕 Semilight" panose="020B0502040204020203" pitchFamily="50" charset="-127"/>
+              </a:rPr>
+              <a:t>Multiplying a matrix by a vector</a:t>
+            </a:r>
+          </a:p>
+          <a:p>
+            <a:pPr marL="457200" indent="-457200">
+              <a:lnSpc>
+                <a:spcPct val="150000"/>
+              </a:lnSpc>
+              <a:buFont typeface="+mj-lt"/>
+              <a:buAutoNum type="arabicPeriod"/>
+            </a:pPr>
+            <a:r>
+              <a:rPr lang="en-US" altLang="ko-KR" sz="2400" b="1" dirty="0">
+                <a:latin typeface="맑은 고딕 Semilight" panose="020B0502040204020203" pitchFamily="50" charset="-127"/>
+                <a:ea typeface="맑은 고딕 Semilight" panose="020B0502040204020203" pitchFamily="50" charset="-127"/>
+                <a:cs typeface="맑은 고딕 Semilight" panose="020B0502040204020203" pitchFamily="50" charset="-127"/>
+              </a:rPr>
+              <a:t>Matrices as linear transformations</a:t>
+            </a:r>
+          </a:p>
+          <a:p>
+            <a:pPr marL="457200" indent="-457200">
+              <a:lnSpc>
+                <a:spcPct val="150000"/>
+              </a:lnSpc>
+              <a:buFont typeface="+mj-lt"/>
+              <a:buAutoNum type="arabicPeriod"/>
+            </a:pPr>
+            <a:r>
+              <a:rPr lang="en-US" altLang="ko-KR" sz="2400" b="1" dirty="0">
+                <a:latin typeface="맑은 고딕 Semilight" panose="020B0502040204020203" pitchFamily="50" charset="-127"/>
+                <a:ea typeface="맑은 고딕 Semilight" panose="020B0502040204020203" pitchFamily="50" charset="-127"/>
+                <a:cs typeface="맑은 고딕 Semilight" panose="020B0502040204020203" pitchFamily="50" charset="-127"/>
+              </a:rPr>
+              <a:t>Matrix multiplication</a:t>
+            </a:r>
+          </a:p>
+        </p:txBody>
+      </p:sp>
+    </p:spTree>
+    <p:extLst>
+      <p:ext uri="{BB962C8B-B14F-4D97-AF65-F5344CB8AC3E}">
+        <p14:creationId xmlns:p14="http://schemas.microsoft.com/office/powerpoint/2010/main" val="2867243791"/>
+      </p:ext>
+    </p:extLst>
+  </p:cSld>
+  <p:clrMapOvr>
+    <a:masterClrMapping/>
+  </p:clrMapOvr>
+  <mc:AlternateContent xmlns:mc="http://schemas.openxmlformats.org/markup-compatibility/2006" xmlns:p14="http://schemas.microsoft.com/office/powerpoint/2010/main">
+    <mc:Choice Requires="p14">
+      <p:transition p14:dur="10"/>
+    </mc:Choice>
+    <mc:Fallback xmlns="">
+      <p:transition/>
+    </mc:Fallback>
+  </mc:AlternateContent>
+</p:sld>
+</file>
+
+<file path=ppt/slides/slide50.xml><?xml version="1.0" encoding="utf-8"?>
 <p:sld xmlns:a="http://schemas.openxmlformats.org/drawingml/2006/main" xmlns:r="http://schemas.openxmlformats.org/officeDocument/2006/relationships" xmlns:p="http://schemas.openxmlformats.org/presentationml/2006/main">
   <p:cSld>
     <p:spTree>
@@ -22246,7 +23575,7 @@
             <a:fld id="{9860EDB8-5305-433F-BE41-D7A86D811DB3}" type="slidenum">
               <a:rPr lang="en-US" altLang="ko-KR" noProof="0" smtClean="0"/>
               <a:pPr/>
-              <a:t>49</a:t>
+              <a:t>50</a:t>
             </a:fld>
             <a:endParaRPr lang="ko-KR" altLang="en-US" noProof="0"/>
           </a:p>
@@ -22303,358 +23632,7 @@
 </p:sld>
 </file>
 
-<file path=ppt/slides/slide5.xml><?xml version="1.0" encoding="utf-8"?>
-<p:sld xmlns:a="http://schemas.openxmlformats.org/drawingml/2006/main" xmlns:r="http://schemas.openxmlformats.org/officeDocument/2006/relationships" xmlns:p="http://schemas.openxmlformats.org/presentationml/2006/main">
-  <p:cSld>
-    <p:spTree>
-      <p:nvGrpSpPr>
-        <p:cNvPr id="1" name="">
-          <a:extLst>
-            <a:ext uri="{FF2B5EF4-FFF2-40B4-BE49-F238E27FC236}">
-              <a16:creationId xmlns:a16="http://schemas.microsoft.com/office/drawing/2014/main" id="{FD0D3AE7-002F-94A0-DA15-81A1CE310A3F}"/>
-            </a:ext>
-          </a:extLst>
-        </p:cNvPr>
-        <p:cNvGrpSpPr/>
-        <p:nvPr/>
-      </p:nvGrpSpPr>
-      <p:grpSpPr>
-        <a:xfrm>
-          <a:off x="0" y="0"/>
-          <a:ext cx="0" cy="0"/>
-          <a:chOff x="0" y="0"/>
-          <a:chExt cx="0" cy="0"/>
-        </a:xfrm>
-      </p:grpSpPr>
-      <p:sp>
-        <p:nvSpPr>
-          <p:cNvPr id="3" name="직사각형 2">
-            <a:extLst>
-              <a:ext uri="{FF2B5EF4-FFF2-40B4-BE49-F238E27FC236}">
-                <a16:creationId xmlns:a16="http://schemas.microsoft.com/office/drawing/2014/main" id="{C9AFE555-A66B-E0EE-1EF0-831B635FB249}"/>
-              </a:ext>
-            </a:extLst>
-          </p:cNvPr>
-          <p:cNvSpPr/>
-          <p:nvPr/>
-        </p:nvSpPr>
-        <p:spPr>
-          <a:xfrm>
-            <a:off x="895927" y="1457931"/>
-            <a:ext cx="5948218" cy="548669"/>
-          </a:xfrm>
-          <a:prstGeom prst="rect">
-            <a:avLst/>
-          </a:prstGeom>
-          <a:solidFill>
-            <a:schemeClr val="bg1">
-              <a:lumMod val="85000"/>
-            </a:schemeClr>
-          </a:solidFill>
-          <a:ln>
-            <a:noFill/>
-          </a:ln>
-        </p:spPr>
-        <p:style>
-          <a:lnRef idx="2">
-            <a:schemeClr val="accent1">
-              <a:shade val="15000"/>
-            </a:schemeClr>
-          </a:lnRef>
-          <a:fillRef idx="1">
-            <a:schemeClr val="accent1"/>
-          </a:fillRef>
-          <a:effectRef idx="0">
-            <a:schemeClr val="accent1"/>
-          </a:effectRef>
-          <a:fontRef idx="minor">
-            <a:schemeClr val="lt1"/>
-          </a:fontRef>
-        </p:style>
-        <p:txBody>
-          <a:bodyPr rtlCol="0" anchor="ctr"/>
-          <a:lstStyle/>
-          <a:p>
-            <a:pPr algn="ctr"/>
-            <a:endParaRPr lang="ko-KR" altLang="en-US" dirty="0"/>
-          </a:p>
-        </p:txBody>
-      </p:sp>
-      <p:sp>
-        <p:nvSpPr>
-          <p:cNvPr id="8" name="제목 7">
-            <a:extLst>
-              <a:ext uri="{FF2B5EF4-FFF2-40B4-BE49-F238E27FC236}">
-                <a16:creationId xmlns:a16="http://schemas.microsoft.com/office/drawing/2014/main" id="{E41AB3BA-A98A-DDCE-D6EA-2DF42D6CE40B}"/>
-              </a:ext>
-            </a:extLst>
-          </p:cNvPr>
-          <p:cNvSpPr>
-            <a:spLocks noGrp="1"/>
-          </p:cNvSpPr>
-          <p:nvPr>
-            <p:ph type="title"/>
-          </p:nvPr>
-        </p:nvSpPr>
-        <p:spPr>
-          <a:xfrm>
-            <a:off x="521207" y="448056"/>
-            <a:ext cx="8135613" cy="640080"/>
-          </a:xfrm>
-        </p:spPr>
-        <p:txBody>
-          <a:bodyPr rtlCol="0">
-            <a:noAutofit/>
-          </a:bodyPr>
-          <a:lstStyle/>
-          <a:p>
-            <a:pPr rtl="0"/>
-            <a:r>
-              <a:rPr lang="en-US" altLang="ko-KR" dirty="0">
-                <a:cs typeface="Segoe UI Light" panose="020B0502040204020203" pitchFamily="34" charset="0"/>
-              </a:rPr>
-              <a:t>Contents</a:t>
-            </a:r>
-            <a:endParaRPr lang="ko-KR" altLang="en-US" dirty="0">
-              <a:cs typeface="Segoe UI Light" panose="020B0502040204020203" pitchFamily="34" charset="0"/>
-            </a:endParaRPr>
-          </a:p>
-        </p:txBody>
-      </p:sp>
-      <p:sp>
-        <p:nvSpPr>
-          <p:cNvPr id="12" name="슬라이드 번호 개체 틀 11">
-            <a:extLst>
-              <a:ext uri="{FF2B5EF4-FFF2-40B4-BE49-F238E27FC236}">
-                <a16:creationId xmlns:a16="http://schemas.microsoft.com/office/drawing/2014/main" id="{FBA6C3AD-7EE6-C223-FA76-995C4A40A54C}"/>
-              </a:ext>
-            </a:extLst>
-          </p:cNvPr>
-          <p:cNvSpPr>
-            <a:spLocks noGrp="1"/>
-          </p:cNvSpPr>
-          <p:nvPr>
-            <p:ph type="sldNum" sz="quarter" idx="4"/>
-          </p:nvPr>
-        </p:nvSpPr>
-        <p:spPr/>
-        <p:txBody>
-          <a:bodyPr/>
-          <a:lstStyle/>
-          <a:p>
-            <a:fld id="{9860EDB8-5305-433F-BE41-D7A86D811DB3}" type="slidenum">
-              <a:rPr lang="en-US" altLang="ko-KR" noProof="0" smtClean="0"/>
-              <a:pPr/>
-              <a:t>5</a:t>
-            </a:fld>
-            <a:endParaRPr lang="ko-KR" altLang="en-US" noProof="0"/>
-          </a:p>
-        </p:txBody>
-      </p:sp>
-      <p:sp>
-        <p:nvSpPr>
-          <p:cNvPr id="2" name="TextBox 1">
-            <a:extLst>
-              <a:ext uri="{FF2B5EF4-FFF2-40B4-BE49-F238E27FC236}">
-                <a16:creationId xmlns:a16="http://schemas.microsoft.com/office/drawing/2014/main" id="{52C5C255-490D-636C-8D95-CEBDAA0AD5B9}"/>
-              </a:ext>
-            </a:extLst>
-          </p:cNvPr>
-          <p:cNvSpPr txBox="1"/>
-          <p:nvPr/>
-        </p:nvSpPr>
-        <p:spPr>
-          <a:xfrm>
-            <a:off x="1764145" y="1384043"/>
-            <a:ext cx="7250546" cy="5006948"/>
-          </a:xfrm>
-          <a:prstGeom prst="rect">
-            <a:avLst/>
-          </a:prstGeom>
-          <a:noFill/>
-        </p:spPr>
-        <p:txBody>
-          <a:bodyPr wrap="square" rtlCol="0">
-            <a:spAutoFit/>
-          </a:bodyPr>
-          <a:lstStyle/>
-          <a:p>
-            <a:pPr marL="457200" indent="-457200">
-              <a:lnSpc>
-                <a:spcPct val="150000"/>
-              </a:lnSpc>
-              <a:buFont typeface="+mj-lt"/>
-              <a:buAutoNum type="arabicPeriod"/>
-            </a:pPr>
-            <a:r>
-              <a:rPr lang="en-US" altLang="ko-KR" sz="2400" b="1" dirty="0">
-                <a:latin typeface="맑은 고딕 Semilight" panose="020B0502040204020203" pitchFamily="50" charset="-127"/>
-                <a:ea typeface="맑은 고딕 Semilight" panose="020B0502040204020203" pitchFamily="50" charset="-127"/>
-                <a:cs typeface="맑은 고딕 Semilight" panose="020B0502040204020203" pitchFamily="50" charset="-127"/>
-              </a:rPr>
-              <a:t>Vectors and their properties</a:t>
-            </a:r>
-          </a:p>
-          <a:p>
-            <a:pPr marL="457200" indent="-457200">
-              <a:lnSpc>
-                <a:spcPct val="150000"/>
-              </a:lnSpc>
-              <a:buFont typeface="+mj-lt"/>
-              <a:buAutoNum type="arabicPeriod"/>
-            </a:pPr>
-            <a:r>
-              <a:rPr lang="en-US" altLang="ko-KR" sz="2400" b="1" dirty="0">
-                <a:latin typeface="맑은 고딕 Semilight" panose="020B0502040204020203" pitchFamily="50" charset="-127"/>
-                <a:ea typeface="맑은 고딕 Semilight" panose="020B0502040204020203" pitchFamily="50" charset="-127"/>
-                <a:cs typeface="맑은 고딕 Semilight" panose="020B0502040204020203" pitchFamily="50" charset="-127"/>
-              </a:rPr>
-              <a:t>Sum and difference of vectors</a:t>
-            </a:r>
-          </a:p>
-          <a:p>
-            <a:pPr marL="457200" indent="-457200">
-              <a:lnSpc>
-                <a:spcPct val="150000"/>
-              </a:lnSpc>
-              <a:buFont typeface="+mj-lt"/>
-              <a:buAutoNum type="arabicPeriod"/>
-            </a:pPr>
-            <a:r>
-              <a:rPr lang="en-US" altLang="ko-KR" sz="2400" b="1" dirty="0">
-                <a:latin typeface="맑은 고딕 Semilight" panose="020B0502040204020203" pitchFamily="50" charset="-127"/>
-                <a:ea typeface="맑은 고딕 Semilight" panose="020B0502040204020203" pitchFamily="50" charset="-127"/>
-                <a:cs typeface="맑은 고딕 Semilight" panose="020B0502040204020203" pitchFamily="50" charset="-127"/>
-              </a:rPr>
-              <a:t>Distance between vectors</a:t>
-            </a:r>
-          </a:p>
-          <a:p>
-            <a:pPr marL="457200" indent="-457200">
-              <a:lnSpc>
-                <a:spcPct val="150000"/>
-              </a:lnSpc>
-              <a:buFont typeface="+mj-lt"/>
-              <a:buAutoNum type="arabicPeriod"/>
-            </a:pPr>
-            <a:r>
-              <a:rPr lang="en-US" altLang="ko-KR" sz="2400" b="1" dirty="0">
-                <a:latin typeface="맑은 고딕 Semilight" panose="020B0502040204020203" pitchFamily="50" charset="-127"/>
-                <a:ea typeface="맑은 고딕 Semilight" panose="020B0502040204020203" pitchFamily="50" charset="-127"/>
-                <a:cs typeface="맑은 고딕 Semilight" panose="020B0502040204020203" pitchFamily="50" charset="-127"/>
-              </a:rPr>
-              <a:t>Multiplying a vector by a scalar</a:t>
-            </a:r>
-          </a:p>
-          <a:p>
-            <a:pPr marL="457200" indent="-457200">
-              <a:lnSpc>
-                <a:spcPct val="150000"/>
-              </a:lnSpc>
-              <a:buFont typeface="+mj-lt"/>
-              <a:buAutoNum type="arabicPeriod"/>
-            </a:pPr>
-            <a:r>
-              <a:rPr lang="en-US" altLang="ko-KR" sz="2400" b="1" dirty="0">
-                <a:latin typeface="맑은 고딕 Semilight" panose="020B0502040204020203" pitchFamily="50" charset="-127"/>
-                <a:ea typeface="맑은 고딕 Semilight" panose="020B0502040204020203" pitchFamily="50" charset="-127"/>
-                <a:cs typeface="맑은 고딕 Semilight" panose="020B0502040204020203" pitchFamily="50" charset="-127"/>
-              </a:rPr>
-              <a:t>The dot product</a:t>
-            </a:r>
-          </a:p>
-          <a:p>
-            <a:pPr marL="457200" indent="-457200">
-              <a:lnSpc>
-                <a:spcPct val="150000"/>
-              </a:lnSpc>
-              <a:buFont typeface="+mj-lt"/>
-              <a:buAutoNum type="arabicPeriod"/>
-            </a:pPr>
-            <a:r>
-              <a:rPr lang="en-US" altLang="ko-KR" sz="2400" b="1" dirty="0">
-                <a:latin typeface="맑은 고딕 Semilight" panose="020B0502040204020203" pitchFamily="50" charset="-127"/>
-                <a:ea typeface="맑은 고딕 Semilight" panose="020B0502040204020203" pitchFamily="50" charset="-127"/>
-                <a:cs typeface="맑은 고딕 Semilight" panose="020B0502040204020203" pitchFamily="50" charset="-127"/>
-              </a:rPr>
-              <a:t>Geometric dot product</a:t>
-            </a:r>
-          </a:p>
-          <a:p>
-            <a:pPr marL="457200" indent="-457200">
-              <a:lnSpc>
-                <a:spcPct val="150000"/>
-              </a:lnSpc>
-              <a:buFont typeface="+mj-lt"/>
-              <a:buAutoNum type="arabicPeriod"/>
-            </a:pPr>
-            <a:r>
-              <a:rPr lang="en-US" altLang="ko-KR" sz="2400" b="1" dirty="0">
-                <a:latin typeface="맑은 고딕 Semilight" panose="020B0502040204020203" pitchFamily="50" charset="-127"/>
-                <a:ea typeface="맑은 고딕 Semilight" panose="020B0502040204020203" pitchFamily="50" charset="-127"/>
-                <a:cs typeface="맑은 고딕 Semilight" panose="020B0502040204020203" pitchFamily="50" charset="-127"/>
-              </a:rPr>
-              <a:t>Multiplying a matrix by a vector</a:t>
-            </a:r>
-          </a:p>
-          <a:p>
-            <a:pPr marL="457200" indent="-457200">
-              <a:lnSpc>
-                <a:spcPct val="150000"/>
-              </a:lnSpc>
-              <a:buFont typeface="+mj-lt"/>
-              <a:buAutoNum type="arabicPeriod"/>
-            </a:pPr>
-            <a:r>
-              <a:rPr lang="en-US" altLang="ko-KR" sz="2400" b="1" dirty="0">
-                <a:latin typeface="맑은 고딕 Semilight" panose="020B0502040204020203" pitchFamily="50" charset="-127"/>
-                <a:ea typeface="맑은 고딕 Semilight" panose="020B0502040204020203" pitchFamily="50" charset="-127"/>
-                <a:cs typeface="맑은 고딕 Semilight" panose="020B0502040204020203" pitchFamily="50" charset="-127"/>
-              </a:rPr>
-              <a:t>Matrices as linear transformations</a:t>
-            </a:r>
-          </a:p>
-          <a:p>
-            <a:pPr marL="457200" indent="-457200">
-              <a:lnSpc>
-                <a:spcPct val="150000"/>
-              </a:lnSpc>
-              <a:buFont typeface="+mj-lt"/>
-              <a:buAutoNum type="arabicPeriod"/>
-            </a:pPr>
-            <a:r>
-              <a:rPr lang="en-US" altLang="ko-KR" sz="2400" b="1" dirty="0">
-                <a:latin typeface="맑은 고딕 Semilight" panose="020B0502040204020203" pitchFamily="50" charset="-127"/>
-                <a:ea typeface="맑은 고딕 Semilight" panose="020B0502040204020203" pitchFamily="50" charset="-127"/>
-                <a:cs typeface="맑은 고딕 Semilight" panose="020B0502040204020203" pitchFamily="50" charset="-127"/>
-              </a:rPr>
-              <a:t>Matrix multiplication</a:t>
-            </a:r>
-          </a:p>
-        </p:txBody>
-      </p:sp>
-    </p:spTree>
-    <p:extLst>
-      <p:ext uri="{BB962C8B-B14F-4D97-AF65-F5344CB8AC3E}">
-        <p14:creationId xmlns:p14="http://schemas.microsoft.com/office/powerpoint/2010/main" val="2867243791"/>
-      </p:ext>
-    </p:extLst>
-  </p:cSld>
-  <p:clrMapOvr>
-    <a:masterClrMapping/>
-  </p:clrMapOvr>
-  <mc:AlternateContent xmlns:mc="http://schemas.openxmlformats.org/markup-compatibility/2006" xmlns:p14="http://schemas.microsoft.com/office/powerpoint/2010/main">
-    <mc:Choice Requires="p14">
-      <p:transition p14:dur="10"/>
-    </mc:Choice>
-    <mc:Fallback xmlns="">
-      <p:transition/>
-    </mc:Fallback>
-  </mc:AlternateContent>
-</p:sld>
-</file>
-
-<file path=ppt/slides/slide50.xml><?xml version="1.0" encoding="utf-8"?>
+<file path=ppt/slides/slide51.xml><?xml version="1.0" encoding="utf-8"?>
 <p:sld xmlns:a="http://schemas.openxmlformats.org/drawingml/2006/main" xmlns:r="http://schemas.openxmlformats.org/officeDocument/2006/relationships" xmlns:p="http://schemas.openxmlformats.org/presentationml/2006/main">
   <p:cSld>
     <p:spTree>
@@ -22739,7 +23717,7 @@
             <a:fld id="{9860EDB8-5305-433F-BE41-D7A86D811DB3}" type="slidenum">
               <a:rPr lang="en-US" altLang="ko-KR" noProof="0" smtClean="0"/>
               <a:pPr/>
-              <a:t>50</a:t>
+              <a:t>51</a:t>
             </a:fld>
             <a:endParaRPr lang="ko-KR" altLang="en-US" noProof="0"/>
           </a:p>
@@ -22796,7 +23774,7 @@
 </p:sld>
 </file>
 
-<file path=ppt/slides/slide51.xml><?xml version="1.0" encoding="utf-8"?>
+<file path=ppt/slides/slide52.xml><?xml version="1.0" encoding="utf-8"?>
 <p:sld xmlns:a="http://schemas.openxmlformats.org/drawingml/2006/main" xmlns:r="http://schemas.openxmlformats.org/officeDocument/2006/relationships" xmlns:p="http://schemas.openxmlformats.org/presentationml/2006/main">
   <p:cSld>
     <p:spTree>
@@ -22881,7 +23859,7 @@
             <a:fld id="{9860EDB8-5305-433F-BE41-D7A86D811DB3}" type="slidenum">
               <a:rPr lang="en-US" altLang="ko-KR" noProof="0" smtClean="0"/>
               <a:pPr/>
-              <a:t>51</a:t>
+              <a:t>52</a:t>
             </a:fld>
             <a:endParaRPr lang="ko-KR" altLang="en-US" noProof="0"/>
           </a:p>
@@ -22968,7 +23946,7 @@
 </p:sld>
 </file>
 
-<file path=ppt/slides/slide52.xml><?xml version="1.0" encoding="utf-8"?>
+<file path=ppt/slides/slide53.xml><?xml version="1.0" encoding="utf-8"?>
 <p:sld xmlns:a="http://schemas.openxmlformats.org/drawingml/2006/main" xmlns:r="http://schemas.openxmlformats.org/officeDocument/2006/relationships" xmlns:p="http://schemas.openxmlformats.org/presentationml/2006/main">
   <p:cSld>
     <p:spTree>
@@ -23053,7 +24031,7 @@
             <a:fld id="{9860EDB8-5305-433F-BE41-D7A86D811DB3}" type="slidenum">
               <a:rPr lang="en-US" altLang="ko-KR" noProof="0" smtClean="0"/>
               <a:pPr/>
-              <a:t>52</a:t>
+              <a:t>53</a:t>
             </a:fld>
             <a:endParaRPr lang="ko-KR" altLang="en-US" noProof="0"/>
           </a:p>
@@ -23217,7 +24195,7 @@
 </p:sld>
 </file>
 
-<file path=ppt/slides/slide53.xml><?xml version="1.0" encoding="utf-8"?>
+<file path=ppt/slides/slide54.xml><?xml version="1.0" encoding="utf-8"?>
 <p:sld xmlns:a="http://schemas.openxmlformats.org/drawingml/2006/main" xmlns:r="http://schemas.openxmlformats.org/officeDocument/2006/relationships" xmlns:p="http://schemas.openxmlformats.org/presentationml/2006/main">
   <p:cSld>
     <p:spTree>
@@ -23920,7 +24898,7 @@
             <a:fld id="{D57F1E4F-1CFF-5643-939E-217C01CDF565}" type="slidenum">
               <a:rPr lang="en-US" sz="2000" smtClean="0"/>
               <a:pPr/>
-              <a:t>53</a:t>
+              <a:t>54</a:t>
             </a:fld>
             <a:endParaRPr lang="en-US" sz="2000" dirty="0"/>
           </a:p>
@@ -23939,7 +24917,7 @@
 </p:sld>
 </file>
 
-<file path=ppt/slides/slide54.xml><?xml version="1.0" encoding="utf-8"?>
+<file path=ppt/slides/slide55.xml><?xml version="1.0" encoding="utf-8"?>
 <p:sld xmlns:a="http://schemas.openxmlformats.org/drawingml/2006/main" xmlns:r="http://schemas.openxmlformats.org/officeDocument/2006/relationships" xmlns:p="http://schemas.openxmlformats.org/presentationml/2006/main">
   <p:cSld>
     <p:spTree>
@@ -24743,7 +25721,7 @@
             <a:fld id="{D57F1E4F-1CFF-5643-939E-217C01CDF565}" type="slidenum">
               <a:rPr lang="en-US" sz="2000" smtClean="0"/>
               <a:pPr/>
-              <a:t>54</a:t>
+              <a:t>55</a:t>
             </a:fld>
             <a:endParaRPr lang="en-US" sz="2000" dirty="0"/>
           </a:p>
@@ -24799,7 +25777,7 @@
 </p:sld>
 </file>
 
-<file path=ppt/slides/slide55.xml><?xml version="1.0" encoding="utf-8"?>
+<file path=ppt/slides/slide56.xml><?xml version="1.0" encoding="utf-8"?>
 <p:sld xmlns:a="http://schemas.openxmlformats.org/drawingml/2006/main" xmlns:r="http://schemas.openxmlformats.org/officeDocument/2006/relationships" xmlns:p="http://schemas.openxmlformats.org/presentationml/2006/main">
   <p:cSld>
     <p:spTree>
@@ -25606,7 +26584,7 @@
 </p:sld>
 </file>
 
-<file path=ppt/slides/slide56.xml><?xml version="1.0" encoding="utf-8"?>
+<file path=ppt/slides/slide57.xml><?xml version="1.0" encoding="utf-8"?>
 <p:sld xmlns:a="http://schemas.openxmlformats.org/drawingml/2006/main" xmlns:r="http://schemas.openxmlformats.org/officeDocument/2006/relationships" xmlns:p="http://schemas.openxmlformats.org/presentationml/2006/main">
   <p:cSld>
     <p:spTree>
@@ -26528,7 +27506,7 @@
 </p:sld>
 </file>
 
-<file path=ppt/slides/slide57.xml><?xml version="1.0" encoding="utf-8"?>
+<file path=ppt/slides/slide58.xml><?xml version="1.0" encoding="utf-8"?>
 <p:sld xmlns:a="http://schemas.openxmlformats.org/drawingml/2006/main" xmlns:r="http://schemas.openxmlformats.org/officeDocument/2006/relationships" xmlns:p="http://schemas.openxmlformats.org/presentationml/2006/main">
   <p:cSld>
     <p:spTree>
@@ -26719,7 +27697,7 @@
 </p:sld>
 </file>
 
-<file path=ppt/slides/slide58.xml><?xml version="1.0" encoding="utf-8"?>
+<file path=ppt/slides/slide59.xml><?xml version="1.0" encoding="utf-8"?>
 <p:sld xmlns:a="http://schemas.openxmlformats.org/drawingml/2006/main" xmlns:r="http://schemas.openxmlformats.org/officeDocument/2006/relationships" xmlns:p="http://schemas.openxmlformats.org/presentationml/2006/main">
   <p:cSld>
     <p:spTree>
@@ -26924,7 +27902,228 @@
 </p:sld>
 </file>
 
-<file path=ppt/slides/slide59.xml><?xml version="1.0" encoding="utf-8"?>
+<file path=ppt/slides/slide6.xml><?xml version="1.0" encoding="utf-8"?>
+<p:sld xmlns:a="http://schemas.openxmlformats.org/drawingml/2006/main" xmlns:r="http://schemas.openxmlformats.org/officeDocument/2006/relationships" xmlns:p="http://schemas.openxmlformats.org/presentationml/2006/main">
+  <p:cSld>
+    <p:spTree>
+      <p:nvGrpSpPr>
+        <p:cNvPr id="1" name="">
+          <a:extLst>
+            <a:ext uri="{FF2B5EF4-FFF2-40B4-BE49-F238E27FC236}">
+              <a16:creationId xmlns:a16="http://schemas.microsoft.com/office/drawing/2014/main" id="{8F177369-1E15-5F94-FD6C-4893AFE87888}"/>
+            </a:ext>
+          </a:extLst>
+        </p:cNvPr>
+        <p:cNvGrpSpPr/>
+        <p:nvPr/>
+      </p:nvGrpSpPr>
+      <p:grpSpPr>
+        <a:xfrm>
+          <a:off x="0" y="0"/>
+          <a:ext cx="0" cy="0"/>
+          <a:chOff x="0" y="0"/>
+          <a:chExt cx="0" cy="0"/>
+        </a:xfrm>
+      </p:grpSpPr>
+      <p:sp>
+        <p:nvSpPr>
+          <p:cNvPr id="8" name="제목 7">
+            <a:extLst>
+              <a:ext uri="{FF2B5EF4-FFF2-40B4-BE49-F238E27FC236}">
+                <a16:creationId xmlns:a16="http://schemas.microsoft.com/office/drawing/2014/main" id="{26F4CC8A-A34F-E8DB-36C1-488614982C81}"/>
+              </a:ext>
+            </a:extLst>
+          </p:cNvPr>
+          <p:cNvSpPr>
+            <a:spLocks noGrp="1"/>
+          </p:cNvSpPr>
+          <p:nvPr>
+            <p:ph type="title"/>
+          </p:nvPr>
+        </p:nvSpPr>
+        <p:spPr>
+          <a:xfrm>
+            <a:off x="521207" y="448056"/>
+            <a:ext cx="8135613" cy="640080"/>
+          </a:xfrm>
+        </p:spPr>
+        <p:txBody>
+          <a:bodyPr rtlCol="0">
+            <a:noAutofit/>
+          </a:bodyPr>
+          <a:lstStyle/>
+          <a:p>
+            <a:pPr rtl="0"/>
+            <a:r>
+              <a:rPr lang="en-US" altLang="ko-KR" dirty="0">
+                <a:cs typeface="Segoe UI Light" panose="020B0502040204020203" pitchFamily="34" charset="0"/>
+              </a:rPr>
+              <a:t>Vectors</a:t>
+            </a:r>
+            <a:endParaRPr lang="ko-KR" altLang="en-US" dirty="0">
+              <a:cs typeface="Segoe UI Light" panose="020B0502040204020203" pitchFamily="34" charset="0"/>
+            </a:endParaRPr>
+          </a:p>
+        </p:txBody>
+      </p:sp>
+      <p:sp>
+        <p:nvSpPr>
+          <p:cNvPr id="12" name="슬라이드 번호 개체 틀 11">
+            <a:extLst>
+              <a:ext uri="{FF2B5EF4-FFF2-40B4-BE49-F238E27FC236}">
+                <a16:creationId xmlns:a16="http://schemas.microsoft.com/office/drawing/2014/main" id="{5750F1BC-B3A2-4A2B-32AC-7F76AD12B5DA}"/>
+              </a:ext>
+            </a:extLst>
+          </p:cNvPr>
+          <p:cNvSpPr>
+            <a:spLocks noGrp="1"/>
+          </p:cNvSpPr>
+          <p:nvPr>
+            <p:ph type="sldNum" sz="quarter" idx="4"/>
+          </p:nvPr>
+        </p:nvSpPr>
+        <p:spPr/>
+        <p:txBody>
+          <a:bodyPr/>
+          <a:lstStyle/>
+          <a:p>
+            <a:fld id="{9860EDB8-5305-433F-BE41-D7A86D811DB3}" type="slidenum">
+              <a:rPr lang="en-US" altLang="ko-KR" noProof="0" smtClean="0"/>
+              <a:pPr/>
+              <a:t>6</a:t>
+            </a:fld>
+            <a:endParaRPr lang="ko-KR" altLang="en-US" noProof="0"/>
+          </a:p>
+        </p:txBody>
+      </p:sp>
+      <p:pic>
+        <p:nvPicPr>
+          <p:cNvPr id="4" name="그림 3">
+            <a:extLst>
+              <a:ext uri="{FF2B5EF4-FFF2-40B4-BE49-F238E27FC236}">
+                <a16:creationId xmlns:a16="http://schemas.microsoft.com/office/drawing/2014/main" id="{2E1AD8E8-F92C-B59E-E547-66C8AC4227A4}"/>
+              </a:ext>
+            </a:extLst>
+          </p:cNvPr>
+          <p:cNvPicPr>
+            <a:picLocks noChangeAspect="1"/>
+          </p:cNvPicPr>
+          <p:nvPr/>
+        </p:nvPicPr>
+        <p:blipFill>
+          <a:blip r:embed="rId3"/>
+          <a:stretch>
+            <a:fillRect/>
+          </a:stretch>
+        </p:blipFill>
+        <p:spPr>
+          <a:xfrm>
+            <a:off x="1403927" y="1852703"/>
+            <a:ext cx="8891077" cy="4145671"/>
+          </a:xfrm>
+          <a:prstGeom prst="rect">
+            <a:avLst/>
+          </a:prstGeom>
+        </p:spPr>
+      </p:pic>
+      <p:sp>
+        <p:nvSpPr>
+          <p:cNvPr id="6" name="TextBox 5">
+            <a:extLst>
+              <a:ext uri="{FF2B5EF4-FFF2-40B4-BE49-F238E27FC236}">
+                <a16:creationId xmlns:a16="http://schemas.microsoft.com/office/drawing/2014/main" id="{1F0BE70D-4CA4-2CB0-BEC0-19211FCF4328}"/>
+              </a:ext>
+            </a:extLst>
+          </p:cNvPr>
+          <p:cNvSpPr txBox="1"/>
+          <p:nvPr/>
+        </p:nvSpPr>
+        <p:spPr>
+          <a:xfrm>
+            <a:off x="4491719" y="1483371"/>
+            <a:ext cx="1847273" cy="369332"/>
+          </a:xfrm>
+          <a:prstGeom prst="rect">
+            <a:avLst/>
+          </a:prstGeom>
+          <a:noFill/>
+        </p:spPr>
+        <p:txBody>
+          <a:bodyPr wrap="square">
+            <a:spAutoFit/>
+          </a:bodyPr>
+          <a:lstStyle/>
+          <a:p>
+            <a:r>
+              <a:rPr lang="en-US" altLang="ko-KR" dirty="0">
+                <a:cs typeface="Segoe UI Light" panose="020B0502040204020203" pitchFamily="34" charset="0"/>
+              </a:rPr>
+              <a:t>Magnitude</a:t>
+            </a:r>
+            <a:endParaRPr lang="ko-KR" altLang="en-US" dirty="0"/>
+          </a:p>
+        </p:txBody>
+      </p:sp>
+      <p:sp>
+        <p:nvSpPr>
+          <p:cNvPr id="9" name="TextBox 8">
+            <a:extLst>
+              <a:ext uri="{FF2B5EF4-FFF2-40B4-BE49-F238E27FC236}">
+                <a16:creationId xmlns:a16="http://schemas.microsoft.com/office/drawing/2014/main" id="{62B40E43-D0F1-86C6-26CC-845A42FD372C}"/>
+              </a:ext>
+            </a:extLst>
+          </p:cNvPr>
+          <p:cNvSpPr txBox="1"/>
+          <p:nvPr/>
+        </p:nvSpPr>
+        <p:spPr>
+          <a:xfrm>
+            <a:off x="6964218" y="1483371"/>
+            <a:ext cx="1293091" cy="369332"/>
+          </a:xfrm>
+          <a:prstGeom prst="rect">
+            <a:avLst/>
+          </a:prstGeom>
+          <a:noFill/>
+        </p:spPr>
+        <p:txBody>
+          <a:bodyPr wrap="square">
+            <a:spAutoFit/>
+          </a:bodyPr>
+          <a:lstStyle/>
+          <a:p>
+            <a:r>
+              <a:rPr lang="en-US" altLang="ko-KR" dirty="0">
+                <a:cs typeface="Segoe UI Light" panose="020B0502040204020203" pitchFamily="34" charset="0"/>
+              </a:rPr>
+              <a:t>Directions</a:t>
+            </a:r>
+            <a:endParaRPr lang="ko-KR" altLang="en-US" dirty="0"/>
+          </a:p>
+        </p:txBody>
+      </p:sp>
+    </p:spTree>
+    <p:extLst>
+      <p:ext uri="{BB962C8B-B14F-4D97-AF65-F5344CB8AC3E}">
+        <p14:creationId xmlns:p14="http://schemas.microsoft.com/office/powerpoint/2010/main" val="3865646897"/>
+      </p:ext>
+    </p:extLst>
+  </p:cSld>
+  <p:clrMapOvr>
+    <a:masterClrMapping/>
+  </p:clrMapOvr>
+  <mc:AlternateContent xmlns:mc="http://schemas.openxmlformats.org/markup-compatibility/2006" xmlns:p14="http://schemas.microsoft.com/office/powerpoint/2010/main">
+    <mc:Choice Requires="p14">
+      <p:transition p14:dur="10"/>
+    </mc:Choice>
+    <mc:Fallback xmlns="">
+      <p:transition/>
+    </mc:Fallback>
+  </mc:AlternateContent>
+</p:sld>
+</file>
+
+<file path=ppt/slides/slide60.xml><?xml version="1.0" encoding="utf-8"?>
 <p:sld xmlns:a="http://schemas.openxmlformats.org/drawingml/2006/main" xmlns:r="http://schemas.openxmlformats.org/officeDocument/2006/relationships" xmlns:p="http://schemas.openxmlformats.org/presentationml/2006/main">
   <p:cSld>
     <p:spTree>
@@ -27028,7 +28227,7 @@
             <a:fld id="{D57F1E4F-1CFF-5643-939E-217C01CDF565}" type="slidenum">
               <a:rPr lang="en-US" smtClean="0"/>
               <a:pPr/>
-              <a:t>59</a:t>
+              <a:t>60</a:t>
             </a:fld>
             <a:endParaRPr lang="en-US" dirty="0"/>
           </a:p>
@@ -28225,228 +29424,7 @@
 </p:sld>
 </file>
 
-<file path=ppt/slides/slide6.xml><?xml version="1.0" encoding="utf-8"?>
-<p:sld xmlns:a="http://schemas.openxmlformats.org/drawingml/2006/main" xmlns:r="http://schemas.openxmlformats.org/officeDocument/2006/relationships" xmlns:p="http://schemas.openxmlformats.org/presentationml/2006/main">
-  <p:cSld>
-    <p:spTree>
-      <p:nvGrpSpPr>
-        <p:cNvPr id="1" name="">
-          <a:extLst>
-            <a:ext uri="{FF2B5EF4-FFF2-40B4-BE49-F238E27FC236}">
-              <a16:creationId xmlns:a16="http://schemas.microsoft.com/office/drawing/2014/main" id="{8F177369-1E15-5F94-FD6C-4893AFE87888}"/>
-            </a:ext>
-          </a:extLst>
-        </p:cNvPr>
-        <p:cNvGrpSpPr/>
-        <p:nvPr/>
-      </p:nvGrpSpPr>
-      <p:grpSpPr>
-        <a:xfrm>
-          <a:off x="0" y="0"/>
-          <a:ext cx="0" cy="0"/>
-          <a:chOff x="0" y="0"/>
-          <a:chExt cx="0" cy="0"/>
-        </a:xfrm>
-      </p:grpSpPr>
-      <p:sp>
-        <p:nvSpPr>
-          <p:cNvPr id="8" name="제목 7">
-            <a:extLst>
-              <a:ext uri="{FF2B5EF4-FFF2-40B4-BE49-F238E27FC236}">
-                <a16:creationId xmlns:a16="http://schemas.microsoft.com/office/drawing/2014/main" id="{26F4CC8A-A34F-E8DB-36C1-488614982C81}"/>
-              </a:ext>
-            </a:extLst>
-          </p:cNvPr>
-          <p:cNvSpPr>
-            <a:spLocks noGrp="1"/>
-          </p:cNvSpPr>
-          <p:nvPr>
-            <p:ph type="title"/>
-          </p:nvPr>
-        </p:nvSpPr>
-        <p:spPr>
-          <a:xfrm>
-            <a:off x="521207" y="448056"/>
-            <a:ext cx="8135613" cy="640080"/>
-          </a:xfrm>
-        </p:spPr>
-        <p:txBody>
-          <a:bodyPr rtlCol="0">
-            <a:noAutofit/>
-          </a:bodyPr>
-          <a:lstStyle/>
-          <a:p>
-            <a:pPr rtl="0"/>
-            <a:r>
-              <a:rPr lang="en-US" altLang="ko-KR" dirty="0">
-                <a:cs typeface="Segoe UI Light" panose="020B0502040204020203" pitchFamily="34" charset="0"/>
-              </a:rPr>
-              <a:t>Vectors</a:t>
-            </a:r>
-            <a:endParaRPr lang="ko-KR" altLang="en-US" dirty="0">
-              <a:cs typeface="Segoe UI Light" panose="020B0502040204020203" pitchFamily="34" charset="0"/>
-            </a:endParaRPr>
-          </a:p>
-        </p:txBody>
-      </p:sp>
-      <p:sp>
-        <p:nvSpPr>
-          <p:cNvPr id="12" name="슬라이드 번호 개체 틀 11">
-            <a:extLst>
-              <a:ext uri="{FF2B5EF4-FFF2-40B4-BE49-F238E27FC236}">
-                <a16:creationId xmlns:a16="http://schemas.microsoft.com/office/drawing/2014/main" id="{5750F1BC-B3A2-4A2B-32AC-7F76AD12B5DA}"/>
-              </a:ext>
-            </a:extLst>
-          </p:cNvPr>
-          <p:cNvSpPr>
-            <a:spLocks noGrp="1"/>
-          </p:cNvSpPr>
-          <p:nvPr>
-            <p:ph type="sldNum" sz="quarter" idx="4"/>
-          </p:nvPr>
-        </p:nvSpPr>
-        <p:spPr/>
-        <p:txBody>
-          <a:bodyPr/>
-          <a:lstStyle/>
-          <a:p>
-            <a:fld id="{9860EDB8-5305-433F-BE41-D7A86D811DB3}" type="slidenum">
-              <a:rPr lang="en-US" altLang="ko-KR" noProof="0" smtClean="0"/>
-              <a:pPr/>
-              <a:t>6</a:t>
-            </a:fld>
-            <a:endParaRPr lang="ko-KR" altLang="en-US" noProof="0"/>
-          </a:p>
-        </p:txBody>
-      </p:sp>
-      <p:pic>
-        <p:nvPicPr>
-          <p:cNvPr id="4" name="그림 3">
-            <a:extLst>
-              <a:ext uri="{FF2B5EF4-FFF2-40B4-BE49-F238E27FC236}">
-                <a16:creationId xmlns:a16="http://schemas.microsoft.com/office/drawing/2014/main" id="{2E1AD8E8-F92C-B59E-E547-66C8AC4227A4}"/>
-              </a:ext>
-            </a:extLst>
-          </p:cNvPr>
-          <p:cNvPicPr>
-            <a:picLocks noChangeAspect="1"/>
-          </p:cNvPicPr>
-          <p:nvPr/>
-        </p:nvPicPr>
-        <p:blipFill>
-          <a:blip r:embed="rId3"/>
-          <a:stretch>
-            <a:fillRect/>
-          </a:stretch>
-        </p:blipFill>
-        <p:spPr>
-          <a:xfrm>
-            <a:off x="1403927" y="1852703"/>
-            <a:ext cx="8891077" cy="4145671"/>
-          </a:xfrm>
-          <a:prstGeom prst="rect">
-            <a:avLst/>
-          </a:prstGeom>
-        </p:spPr>
-      </p:pic>
-      <p:sp>
-        <p:nvSpPr>
-          <p:cNvPr id="6" name="TextBox 5">
-            <a:extLst>
-              <a:ext uri="{FF2B5EF4-FFF2-40B4-BE49-F238E27FC236}">
-                <a16:creationId xmlns:a16="http://schemas.microsoft.com/office/drawing/2014/main" id="{1F0BE70D-4CA4-2CB0-BEC0-19211FCF4328}"/>
-              </a:ext>
-            </a:extLst>
-          </p:cNvPr>
-          <p:cNvSpPr txBox="1"/>
-          <p:nvPr/>
-        </p:nvSpPr>
-        <p:spPr>
-          <a:xfrm>
-            <a:off x="4491719" y="1483371"/>
-            <a:ext cx="1847273" cy="369332"/>
-          </a:xfrm>
-          <a:prstGeom prst="rect">
-            <a:avLst/>
-          </a:prstGeom>
-          <a:noFill/>
-        </p:spPr>
-        <p:txBody>
-          <a:bodyPr wrap="square">
-            <a:spAutoFit/>
-          </a:bodyPr>
-          <a:lstStyle/>
-          <a:p>
-            <a:r>
-              <a:rPr lang="en-US" altLang="ko-KR" dirty="0">
-                <a:cs typeface="Segoe UI Light" panose="020B0502040204020203" pitchFamily="34" charset="0"/>
-              </a:rPr>
-              <a:t>Magnitude</a:t>
-            </a:r>
-            <a:endParaRPr lang="ko-KR" altLang="en-US" dirty="0"/>
-          </a:p>
-        </p:txBody>
-      </p:sp>
-      <p:sp>
-        <p:nvSpPr>
-          <p:cNvPr id="9" name="TextBox 8">
-            <a:extLst>
-              <a:ext uri="{FF2B5EF4-FFF2-40B4-BE49-F238E27FC236}">
-                <a16:creationId xmlns:a16="http://schemas.microsoft.com/office/drawing/2014/main" id="{62B40E43-D0F1-86C6-26CC-845A42FD372C}"/>
-              </a:ext>
-            </a:extLst>
-          </p:cNvPr>
-          <p:cNvSpPr txBox="1"/>
-          <p:nvPr/>
-        </p:nvSpPr>
-        <p:spPr>
-          <a:xfrm>
-            <a:off x="6964218" y="1483371"/>
-            <a:ext cx="1293091" cy="369332"/>
-          </a:xfrm>
-          <a:prstGeom prst="rect">
-            <a:avLst/>
-          </a:prstGeom>
-          <a:noFill/>
-        </p:spPr>
-        <p:txBody>
-          <a:bodyPr wrap="square">
-            <a:spAutoFit/>
-          </a:bodyPr>
-          <a:lstStyle/>
-          <a:p>
-            <a:r>
-              <a:rPr lang="en-US" altLang="ko-KR" dirty="0">
-                <a:cs typeface="Segoe UI Light" panose="020B0502040204020203" pitchFamily="34" charset="0"/>
-              </a:rPr>
-              <a:t>Directions</a:t>
-            </a:r>
-            <a:endParaRPr lang="ko-KR" altLang="en-US" dirty="0"/>
-          </a:p>
-        </p:txBody>
-      </p:sp>
-    </p:spTree>
-    <p:extLst>
-      <p:ext uri="{BB962C8B-B14F-4D97-AF65-F5344CB8AC3E}">
-        <p14:creationId xmlns:p14="http://schemas.microsoft.com/office/powerpoint/2010/main" val="3865646897"/>
-      </p:ext>
-    </p:extLst>
-  </p:cSld>
-  <p:clrMapOvr>
-    <a:masterClrMapping/>
-  </p:clrMapOvr>
-  <mc:AlternateContent xmlns:mc="http://schemas.openxmlformats.org/markup-compatibility/2006" xmlns:p14="http://schemas.microsoft.com/office/powerpoint/2010/main">
-    <mc:Choice Requires="p14">
-      <p:transition p14:dur="10"/>
-    </mc:Choice>
-    <mc:Fallback xmlns="">
-      <p:transition/>
-    </mc:Fallback>
-  </mc:AlternateContent>
-</p:sld>
-</file>
-
-<file path=ppt/slides/slide60.xml><?xml version="1.0" encoding="utf-8"?>
+<file path=ppt/slides/slide61.xml><?xml version="1.0" encoding="utf-8"?>
 <p:sld xmlns:a="http://schemas.openxmlformats.org/drawingml/2006/main" xmlns:r="http://schemas.openxmlformats.org/officeDocument/2006/relationships" xmlns:p="http://schemas.openxmlformats.org/presentationml/2006/main">
   <p:cSld>
     <p:spTree>
@@ -28517,7 +29495,7 @@
             <a:fld id="{D57F1E4F-1CFF-5643-939E-217C01CDF565}" type="slidenum">
               <a:rPr lang="en-US" smtClean="0"/>
               <a:pPr/>
-              <a:t>60</a:t>
+              <a:t>61</a:t>
             </a:fld>
             <a:endParaRPr lang="en-US" dirty="0"/>
           </a:p>
@@ -30509,7 +31487,7 @@
 </p:sld>
 </file>
 
-<file path=ppt/slides/slide61.xml><?xml version="1.0" encoding="utf-8"?>
+<file path=ppt/slides/slide62.xml><?xml version="1.0" encoding="utf-8"?>
 <p:sld xmlns:a="http://schemas.openxmlformats.org/drawingml/2006/main" xmlns:r="http://schemas.openxmlformats.org/officeDocument/2006/relationships" xmlns:p="http://schemas.openxmlformats.org/presentationml/2006/main">
   <p:cSld>
     <p:spTree>
@@ -30598,7 +31576,7 @@
             <a:fld id="{D57F1E4F-1CFF-5643-939E-217C01CDF565}" type="slidenum">
               <a:rPr lang="en-US" smtClean="0"/>
               <a:pPr/>
-              <a:t>61</a:t>
+              <a:t>62</a:t>
             </a:fld>
             <a:endParaRPr lang="en-US" dirty="0"/>
           </a:p>
@@ -31783,7 +32761,7 @@
 </p:sld>
 </file>
 
-<file path=ppt/slides/slide62.xml><?xml version="1.0" encoding="utf-8"?>
+<file path=ppt/slides/slide63.xml><?xml version="1.0" encoding="utf-8"?>
 <p:sld xmlns:a="http://schemas.openxmlformats.org/drawingml/2006/main" xmlns:r="http://schemas.openxmlformats.org/officeDocument/2006/relationships" xmlns:p="http://schemas.openxmlformats.org/presentationml/2006/main">
   <p:cSld>
     <p:spTree>
